--- a/Docs/MotorScoring_Auth_MFA_Identity.pptx
+++ b/Docs/MotorScoring_Auth_MFA_Identity.pptx
@@ -4,6 +4,9 @@
   <p:sldMasterIdLst>
     <p:sldMasterId id="2147483648" r:id="rId1"/>
   </p:sldMasterIdLst>
+  <p:notesMasterIdLst>
+    <p:notesMasterId r:id="rId16"/>
+  </p:notesMasterIdLst>
   <p:sldIdLst>
     <p:sldId id="256" r:id="rId2"/>
     <p:sldId id="257" r:id="rId3"/>
@@ -20,9 +23,6 @@
     <p:sldId id="268" r:id="rId14"/>
     <p:sldId id="269" r:id="rId15"/>
   </p:sldIdLst>
-  <p:notesMasterIdLst>
-    <p:notesMasterId r:id="rId16"/>
-  </p:notesMasterIdLst>
   <p:sldSz cx="12192000" cy="6858000"/>
   <p:notesSz cx="6858000" cy="12192000"/>
   <p:defaultTextStyle>
@@ -117,6 +117,11 @@
       </a:defRPr>
     </a:lvl9pPr>
   </p:defaultTextStyle>
+  <p:extLst>
+    <p:ext uri="{EFAFB233-063F-42B5-8137-9DF3F51BA10A}">
+      <p15:sldGuideLst xmlns:p15="http://schemas.microsoft.com/office/powerpoint/2012/main"/>
+    </p:ext>
+  </p:extLst>
 </p:presentation>
 </file>
 
@@ -142,234 +147,10 @@
           <a:chExt cx="0" cy="0"/>
         </a:xfrm>
       </p:grpSpPr>
-      <p:sp>
-        <p:nvSpPr>
-          <p:cNvPr id="2" name="Header Placeholder 1"/>
-          <p:cNvSpPr>
-            <a:spLocks noGrp="1"/>
-          </p:cNvSpPr>
-          <p:nvPr>
-            <p:ph type="hdr" sz="quarter"/>
-          </p:nvPr>
-        </p:nvSpPr>
-        <p:spPr>
-          <a:xfrm>
-            <a:off x="0" y="0"/>
-            <a:ext cx="2971800" cy="458788"/>
-          </a:xfrm>
-          <a:prstGeom prst="rect">
-            <a:avLst/>
-          </a:prstGeom>
-        </p:spPr>
-        <p:txBody>
-          <a:bodyPr vert="horz" lIns="91440" tIns="45720" rIns="91440" bIns="45720" rtlCol="0"/>
-          <a:lstStyle>
-            <a:lvl1pPr algn="l">
-              <a:defRPr sz="1200"/>
-            </a:lvl1pPr>
-          </a:lstStyle>
-          <a:p>
-            <a:endParaRPr lang="en-US"/>
-          </a:p>
-        </p:txBody>
-      </p:sp>
-      <p:sp>
-        <p:nvSpPr>
-          <p:cNvPr id="3" name="Date Placeholder 2"/>
-          <p:cNvSpPr>
-            <a:spLocks noGrp="1"/>
-          </p:cNvSpPr>
-          <p:nvPr>
-            <p:ph type="dt" idx="1"/>
-          </p:nvPr>
-        </p:nvSpPr>
-        <p:spPr>
-          <a:xfrm>
-            <a:off x="3884613" y="0"/>
-            <a:ext cx="2971800" cy="458788"/>
-          </a:xfrm>
-          <a:prstGeom prst="rect">
-            <a:avLst/>
-          </a:prstGeom>
-        </p:spPr>
-        <p:txBody>
-          <a:bodyPr vert="horz" lIns="91440" tIns="45720" rIns="91440" bIns="45720" rtlCol="0"/>
-          <a:lstStyle>
-            <a:lvl1pPr algn="r">
-              <a:defRPr sz="1200"/>
-            </a:lvl1pPr>
-          </a:lstStyle>
-          <a:p>
-            <a:fld id="{5282F153-3F37-0F45-9E97-73ACFA13230C}" type="datetimeFigureOut">
-              <a:rPr lang="en-US"/>
-              <a:t>7/23/19</a:t>
-            </a:fld>
-            <a:endParaRPr lang="en-US"/>
-          </a:p>
-        </p:txBody>
-      </p:sp>
-      <p:sp>
-        <p:nvSpPr>
-          <p:cNvPr id="4" name="Slide Image Placeholder 3"/>
-          <p:cNvSpPr>
-            <a:spLocks noGrp="1" noRot="1" noChangeAspect="1"/>
-          </p:cNvSpPr>
-          <p:nvPr>
-            <p:ph type="sldImg" idx="2"/>
-          </p:nvPr>
-        </p:nvSpPr>
-        <p:spPr>
-          <a:xfrm>
-            <a:off x="685800" y="1143000"/>
-            <a:ext cx="5486400" cy="3086100"/>
-          </a:xfrm>
-          <a:prstGeom prst="rect">
-            <a:avLst/>
-          </a:prstGeom>
-          <a:noFill/>
-          <a:ln w="12700">
-            <a:solidFill>
-              <a:prstClr val="black"/>
-            </a:solidFill>
-          </a:ln>
-        </p:spPr>
-        <p:txBody>
-          <a:bodyPr vert="horz" lIns="91440" tIns="45720" rIns="91440" bIns="45720" rtlCol="0" anchor="ctr"/>
-          <a:lstStyle/>
-          <a:p>
-            <a:endParaRPr lang="en-US"/>
-          </a:p>
-        </p:txBody>
-      </p:sp>
-      <p:sp>
-        <p:nvSpPr>
-          <p:cNvPr id="5" name="Notes Placeholder 4"/>
-          <p:cNvSpPr>
-            <a:spLocks noGrp="1"/>
-          </p:cNvSpPr>
-          <p:nvPr>
-            <p:ph type="body" sz="quarter" idx="3"/>
-          </p:nvPr>
-        </p:nvSpPr>
-        <p:spPr>
-          <a:xfrm>
-            <a:off x="685800" y="4400550"/>
-            <a:ext cx="5486400" cy="3600450"/>
-          </a:xfrm>
-          <a:prstGeom prst="rect">
-            <a:avLst/>
-          </a:prstGeom>
-        </p:spPr>
-        <p:txBody>
-          <a:bodyPr vert="horz" lIns="91440" tIns="45720" rIns="91440" bIns="45720" rtlCol="0"/>
-          <a:lstStyle/>
-          <a:p>
-            <a:pPr lvl="0"/>
-            <a:r>
-              <a:rPr lang="en-US"/>
-              <a:t>Click to edit Master text styles</a:t>
-            </a:r>
-          </a:p>
-          <a:p>
-            <a:pPr lvl="1"/>
-            <a:r>
-              <a:rPr lang="en-US"/>
-              <a:t>Second level</a:t>
-            </a:r>
-          </a:p>
-          <a:p>
-            <a:pPr lvl="2"/>
-            <a:r>
-              <a:rPr lang="en-US"/>
-              <a:t>Third level</a:t>
-            </a:r>
-          </a:p>
-          <a:p>
-            <a:pPr lvl="3"/>
-            <a:r>
-              <a:rPr lang="en-US"/>
-              <a:t>Fourth level</a:t>
-            </a:r>
-          </a:p>
-          <a:p>
-            <a:pPr lvl="4"/>
-            <a:r>
-              <a:rPr lang="en-US"/>
-              <a:t>Fifth level</a:t>
-            </a:r>
-          </a:p>
-        </p:txBody>
-      </p:sp>
-      <p:sp>
-        <p:nvSpPr>
-          <p:cNvPr id="6" name="Footer Placeholder 5"/>
-          <p:cNvSpPr>
-            <a:spLocks noGrp="1"/>
-          </p:cNvSpPr>
-          <p:nvPr>
-            <p:ph type="ftr" sz="quarter" idx="4"/>
-          </p:nvPr>
-        </p:nvSpPr>
-        <p:spPr>
-          <a:xfrm>
-            <a:off x="0" y="8685213"/>
-            <a:ext cx="2971800" cy="458787"/>
-          </a:xfrm>
-          <a:prstGeom prst="rect">
-            <a:avLst/>
-          </a:prstGeom>
-        </p:spPr>
-        <p:txBody>
-          <a:bodyPr vert="horz" lIns="91440" tIns="45720" rIns="91440" bIns="45720" rtlCol="0" anchor="b"/>
-          <a:lstStyle>
-            <a:lvl1pPr algn="l">
-              <a:defRPr sz="1200"/>
-            </a:lvl1pPr>
-          </a:lstStyle>
-          <a:p>
-            <a:endParaRPr lang="en-US"/>
-          </a:p>
-        </p:txBody>
-      </p:sp>
-      <p:sp>
-        <p:nvSpPr>
-          <p:cNvPr id="7" name="Slide Number Placeholder 6"/>
-          <p:cNvSpPr>
-            <a:spLocks noGrp="1"/>
-          </p:cNvSpPr>
-          <p:nvPr>
-            <p:ph type="sldNum" sz="quarter" idx="5"/>
-          </p:nvPr>
-        </p:nvSpPr>
-        <p:spPr>
-          <a:xfrm>
-            <a:off x="3884613" y="8685213"/>
-            <a:ext cx="2971800" cy="458787"/>
-          </a:xfrm>
-          <a:prstGeom prst="rect">
-            <a:avLst/>
-          </a:prstGeom>
-        </p:spPr>
-        <p:txBody>
-          <a:bodyPr vert="horz" lIns="91440" tIns="45720" rIns="91440" bIns="45720" rtlCol="0" anchor="b"/>
-          <a:lstStyle>
-            <a:lvl1pPr algn="r">
-              <a:defRPr sz="1200"/>
-            </a:lvl1pPr>
-          </a:lstStyle>
-          <a:p>
-            <a:fld id="{CE5E9CC1-C706-0F49-92D6-E571CC5EEA8F}" type="slidenum">
-              <a:rPr lang="en-US"/>
-              <a:t>‹#›</a:t>
-            </a:fld>
-            <a:endParaRPr lang="en-US"/>
-          </a:p>
-        </p:txBody>
-      </p:sp>
     </p:spTree>
     <p:extLst>
       <p:ext uri="{BB962C8B-B14F-4D97-AF65-F5344CB8AC3E}">
-        <p14:creationId xmlns:p14="http://schemas.microsoft.com/office/powerpoint/2010/main" val="1024086991"/>
+        <p14:creationId xmlns:p14="http://schemas.microsoft.com/office/powerpoint/2010/main" val="701864065"/>
       </p:ext>
     </p:extLst>
   </p:cSld>
@@ -497,6 +278,13 @@
           </p:nvPr>
         </p:nvSpPr>
         <p:spPr/>
+        <p:txBody>
+          <a:bodyPr/>
+          <a:lstStyle/>
+          <a:p>
+            <a:endParaRPr lang="es-PE"/>
+          </a:p>
+        </p:txBody>
       </p:sp>
       <p:sp>
         <p:nvSpPr>
@@ -513,10 +301,6 @@
           <a:bodyPr/>
           <a:lstStyle/>
           <a:p>
-            <a:r>
-              <a:rPr lang="en-US" dirty="0"/>
-              <a:t/>
-            </a:r>
             <a:endParaRPr lang="en-US" dirty="0"/>
           </a:p>
         </p:txBody>
@@ -585,6 +369,13 @@
           </p:nvPr>
         </p:nvSpPr>
         <p:spPr/>
+        <p:txBody>
+          <a:bodyPr/>
+          <a:lstStyle/>
+          <a:p>
+            <a:endParaRPr lang="es-PE"/>
+          </a:p>
+        </p:txBody>
       </p:sp>
       <p:sp>
         <p:nvSpPr>
@@ -601,10 +392,6 @@
           <a:bodyPr/>
           <a:lstStyle/>
           <a:p>
-            <a:r>
-              <a:rPr lang="en-US" dirty="0"/>
-              <a:t/>
-            </a:r>
             <a:endParaRPr lang="en-US" dirty="0"/>
           </a:p>
         </p:txBody>
@@ -673,6 +460,13 @@
           </p:nvPr>
         </p:nvSpPr>
         <p:spPr/>
+        <p:txBody>
+          <a:bodyPr/>
+          <a:lstStyle/>
+          <a:p>
+            <a:endParaRPr lang="es-PE"/>
+          </a:p>
+        </p:txBody>
       </p:sp>
       <p:sp>
         <p:nvSpPr>
@@ -689,10 +483,6 @@
           <a:bodyPr/>
           <a:lstStyle/>
           <a:p>
-            <a:r>
-              <a:rPr lang="en-US" dirty="0"/>
-              <a:t/>
-            </a:r>
             <a:endParaRPr lang="en-US" dirty="0"/>
           </a:p>
         </p:txBody>
@@ -761,6 +551,13 @@
           </p:nvPr>
         </p:nvSpPr>
         <p:spPr/>
+        <p:txBody>
+          <a:bodyPr/>
+          <a:lstStyle/>
+          <a:p>
+            <a:endParaRPr lang="es-PE"/>
+          </a:p>
+        </p:txBody>
       </p:sp>
       <p:sp>
         <p:nvSpPr>
@@ -777,10 +574,6 @@
           <a:bodyPr/>
           <a:lstStyle/>
           <a:p>
-            <a:r>
-              <a:rPr lang="en-US" dirty="0"/>
-              <a:t/>
-            </a:r>
             <a:endParaRPr lang="en-US" dirty="0"/>
           </a:p>
         </p:txBody>
@@ -849,6 +642,13 @@
           </p:nvPr>
         </p:nvSpPr>
         <p:spPr/>
+        <p:txBody>
+          <a:bodyPr/>
+          <a:lstStyle/>
+          <a:p>
+            <a:endParaRPr lang="es-PE"/>
+          </a:p>
+        </p:txBody>
       </p:sp>
       <p:sp>
         <p:nvSpPr>
@@ -865,10 +665,6 @@
           <a:bodyPr/>
           <a:lstStyle/>
           <a:p>
-            <a:r>
-              <a:rPr lang="en-US" dirty="0"/>
-              <a:t/>
-            </a:r>
             <a:endParaRPr lang="en-US" dirty="0"/>
           </a:p>
         </p:txBody>
@@ -937,6 +733,13 @@
           </p:nvPr>
         </p:nvSpPr>
         <p:spPr/>
+        <p:txBody>
+          <a:bodyPr/>
+          <a:lstStyle/>
+          <a:p>
+            <a:endParaRPr lang="es-PE"/>
+          </a:p>
+        </p:txBody>
       </p:sp>
       <p:sp>
         <p:nvSpPr>
@@ -953,10 +756,6 @@
           <a:bodyPr/>
           <a:lstStyle/>
           <a:p>
-            <a:r>
-              <a:rPr lang="en-US" dirty="0"/>
-              <a:t/>
-            </a:r>
             <a:endParaRPr lang="en-US" dirty="0"/>
           </a:p>
         </p:txBody>
@@ -1025,6 +824,13 @@
           </p:nvPr>
         </p:nvSpPr>
         <p:spPr/>
+        <p:txBody>
+          <a:bodyPr/>
+          <a:lstStyle/>
+          <a:p>
+            <a:endParaRPr lang="es-PE"/>
+          </a:p>
+        </p:txBody>
       </p:sp>
       <p:sp>
         <p:nvSpPr>
@@ -1041,10 +847,6 @@
           <a:bodyPr/>
           <a:lstStyle/>
           <a:p>
-            <a:r>
-              <a:rPr lang="en-US" dirty="0"/>
-              <a:t/>
-            </a:r>
             <a:endParaRPr lang="en-US" dirty="0"/>
           </a:p>
         </p:txBody>
@@ -1113,6 +915,13 @@
           </p:nvPr>
         </p:nvSpPr>
         <p:spPr/>
+        <p:txBody>
+          <a:bodyPr/>
+          <a:lstStyle/>
+          <a:p>
+            <a:endParaRPr lang="es-PE"/>
+          </a:p>
+        </p:txBody>
       </p:sp>
       <p:sp>
         <p:nvSpPr>
@@ -1129,10 +938,6 @@
           <a:bodyPr/>
           <a:lstStyle/>
           <a:p>
-            <a:r>
-              <a:rPr lang="en-US" dirty="0"/>
-              <a:t/>
-            </a:r>
             <a:endParaRPr lang="en-US" dirty="0"/>
           </a:p>
         </p:txBody>
@@ -1201,6 +1006,13 @@
           </p:nvPr>
         </p:nvSpPr>
         <p:spPr/>
+        <p:txBody>
+          <a:bodyPr/>
+          <a:lstStyle/>
+          <a:p>
+            <a:endParaRPr lang="es-PE"/>
+          </a:p>
+        </p:txBody>
       </p:sp>
       <p:sp>
         <p:nvSpPr>
@@ -1217,10 +1029,6 @@
           <a:bodyPr/>
           <a:lstStyle/>
           <a:p>
-            <a:r>
-              <a:rPr lang="en-US" dirty="0"/>
-              <a:t/>
-            </a:r>
             <a:endParaRPr lang="en-US" dirty="0"/>
           </a:p>
         </p:txBody>
@@ -1289,6 +1097,13 @@
           </p:nvPr>
         </p:nvSpPr>
         <p:spPr/>
+        <p:txBody>
+          <a:bodyPr/>
+          <a:lstStyle/>
+          <a:p>
+            <a:endParaRPr lang="es-PE"/>
+          </a:p>
+        </p:txBody>
       </p:sp>
       <p:sp>
         <p:nvSpPr>
@@ -1305,10 +1120,6 @@
           <a:bodyPr/>
           <a:lstStyle/>
           <a:p>
-            <a:r>
-              <a:rPr lang="en-US" dirty="0"/>
-              <a:t/>
-            </a:r>
             <a:endParaRPr lang="en-US" dirty="0"/>
           </a:p>
         </p:txBody>
@@ -1377,6 +1188,13 @@
           </p:nvPr>
         </p:nvSpPr>
         <p:spPr/>
+        <p:txBody>
+          <a:bodyPr/>
+          <a:lstStyle/>
+          <a:p>
+            <a:endParaRPr lang="es-PE"/>
+          </a:p>
+        </p:txBody>
       </p:sp>
       <p:sp>
         <p:nvSpPr>
@@ -1393,10 +1211,6 @@
           <a:bodyPr/>
           <a:lstStyle/>
           <a:p>
-            <a:r>
-              <a:rPr lang="en-US" dirty="0"/>
-              <a:t/>
-            </a:r>
             <a:endParaRPr lang="en-US" dirty="0"/>
           </a:p>
         </p:txBody>
@@ -1465,6 +1279,13 @@
           </p:nvPr>
         </p:nvSpPr>
         <p:spPr/>
+        <p:txBody>
+          <a:bodyPr/>
+          <a:lstStyle/>
+          <a:p>
+            <a:endParaRPr lang="es-PE"/>
+          </a:p>
+        </p:txBody>
       </p:sp>
       <p:sp>
         <p:nvSpPr>
@@ -1481,10 +1302,6 @@
           <a:bodyPr/>
           <a:lstStyle/>
           <a:p>
-            <a:r>
-              <a:rPr lang="en-US" dirty="0"/>
-              <a:t/>
-            </a:r>
             <a:endParaRPr lang="en-US" dirty="0"/>
           </a:p>
         </p:txBody>
@@ -1553,6 +1370,13 @@
           </p:nvPr>
         </p:nvSpPr>
         <p:spPr/>
+        <p:txBody>
+          <a:bodyPr/>
+          <a:lstStyle/>
+          <a:p>
+            <a:endParaRPr lang="es-PE"/>
+          </a:p>
+        </p:txBody>
       </p:sp>
       <p:sp>
         <p:nvSpPr>
@@ -1569,10 +1393,6 @@
           <a:bodyPr/>
           <a:lstStyle/>
           <a:p>
-            <a:r>
-              <a:rPr lang="en-US" dirty="0"/>
-              <a:t/>
-            </a:r>
             <a:endParaRPr lang="en-US" dirty="0"/>
           </a:p>
         </p:txBody>
@@ -1641,6 +1461,13 @@
           </p:nvPr>
         </p:nvSpPr>
         <p:spPr/>
+        <p:txBody>
+          <a:bodyPr/>
+          <a:lstStyle/>
+          <a:p>
+            <a:endParaRPr lang="es-PE"/>
+          </a:p>
+        </p:txBody>
       </p:sp>
       <p:sp>
         <p:nvSpPr>
@@ -1657,10 +1484,6 @@
           <a:bodyPr/>
           <a:lstStyle/>
           <a:p>
-            <a:r>
-              <a:rPr lang="en-US" dirty="0"/>
-              <a:t/>
-            </a:r>
             <a:endParaRPr lang="en-US" dirty="0"/>
           </a:p>
         </p:txBody>
@@ -1734,6 +1557,11 @@
 <file path=ppt/slideMasters/slideMaster1.xml><?xml version="1.0" encoding="utf-8"?>
 <p:sldMaster xmlns:a="http://schemas.openxmlformats.org/drawingml/2006/main" xmlns:r="http://schemas.openxmlformats.org/officeDocument/2006/relationships" xmlns:p="http://schemas.openxmlformats.org/presentationml/2006/main">
   <p:cSld>
+    <p:bg>
+      <p:bgRef idx="1001">
+        <a:schemeClr val="bg1"/>
+      </p:bgRef>
+    </p:bg>
     <p:spTree>
       <p:nvGrpSpPr>
         <p:cNvPr id="1" name=""/>
@@ -2016,6 +1844,7 @@
         <a:solidFill>
           <a:srgbClr val="082F67"/>
         </a:solidFill>
+        <a:effectLst/>
       </p:bgPr>
     </p:bg>
     <p:spTree>
@@ -2051,6 +1880,13 @@
           </a:solidFill>
           <a:ln/>
         </p:spPr>
+        <p:txBody>
+          <a:bodyPr/>
+          <a:lstStyle/>
+          <a:p>
+            <a:endParaRPr lang="es-PE"/>
+          </a:p>
+        </p:txBody>
       </p:sp>
       <p:sp>
         <p:nvSpPr>
@@ -2071,6 +1907,13 @@
           </a:solidFill>
           <a:ln/>
         </p:spPr>
+        <p:txBody>
+          <a:bodyPr/>
+          <a:lstStyle/>
+          <a:p>
+            <a:endParaRPr lang="es-PE"/>
+          </a:p>
+        </p:txBody>
       </p:sp>
       <p:sp>
         <p:nvSpPr>
@@ -2093,6 +1936,13 @@
           </a:solidFill>
           <a:ln/>
         </p:spPr>
+        <p:txBody>
+          <a:bodyPr/>
+          <a:lstStyle/>
+          <a:p>
+            <a:endParaRPr lang="es-PE"/>
+          </a:p>
+        </p:txBody>
       </p:sp>
       <p:sp>
         <p:nvSpPr>
@@ -2115,11 +1965,11 @@
           <a:bodyPr wrap="square" lIns="0" tIns="0" rIns="0" bIns="0" rtlCol="0" anchor="ctr"/>
           <a:lstStyle/>
           <a:p>
-            <a:pPr indent="0" marL="0">
-              <a:buNone/>
-            </a:pPr>
-            <a:r>
-              <a:rPr lang="en-US" sz="1400" b="1" spc="300" kern="0" dirty="0">
+            <a:pPr marL="0" indent="0">
+              <a:buNone/>
+            </a:pPr>
+            <a:r>
+              <a:rPr lang="en-US" sz="1400" b="1" kern="0" spc="300" dirty="0">
                 <a:solidFill>
                   <a:srgbClr val="00C2A8"/>
                 </a:solidFill>
@@ -2154,7 +2004,7 @@
           <a:bodyPr wrap="square" lIns="0" tIns="0" rIns="0" bIns="0" rtlCol="0" anchor="ctr"/>
           <a:lstStyle/>
           <a:p>
-            <a:pPr indent="0" marL="0">
+            <a:pPr marL="0" indent="0">
               <a:lnSpc>
                 <a:spcPct val="105000"/>
               </a:lnSpc>
@@ -2196,7 +2046,7 @@
           <a:bodyPr wrap="square" lIns="0" tIns="0" rIns="0" bIns="0" rtlCol="0" anchor="ctr"/>
           <a:lstStyle/>
           <a:p>
-            <a:pPr indent="0" marL="0">
+            <a:pPr marL="0" indent="0">
               <a:buNone/>
             </a:pPr>
             <a:r>
@@ -2213,7 +2063,7 @@
             <a:endParaRPr lang="en-US" sz="1500" dirty="0"/>
           </a:p>
           <a:p>
-            <a:pPr indent="0" marL="0">
+            <a:pPr marL="0" indent="0">
               <a:buNone/>
             </a:pPr>
             <a:r>
@@ -2252,6 +2102,13 @@
           </a:solidFill>
           <a:ln/>
         </p:spPr>
+        <p:txBody>
+          <a:bodyPr/>
+          <a:lstStyle/>
+          <a:p>
+            <a:endParaRPr lang="es-PE"/>
+          </a:p>
+        </p:txBody>
       </p:sp>
       <p:sp>
         <p:nvSpPr>
@@ -2274,7 +2131,7 @@
           <a:bodyPr wrap="square" lIns="0" tIns="0" rIns="0" bIns="0" rtlCol="0" anchor="ctr"/>
           <a:lstStyle/>
           <a:p>
-            <a:pPr algn="ctr" indent="0" marL="0">
+            <a:pPr marL="0" indent="0" algn="ctr">
               <a:buNone/>
             </a:pPr>
             <a:r>
@@ -2313,6 +2170,13 @@
           </a:solidFill>
           <a:ln/>
         </p:spPr>
+        <p:txBody>
+          <a:bodyPr/>
+          <a:lstStyle/>
+          <a:p>
+            <a:endParaRPr lang="es-PE"/>
+          </a:p>
+        </p:txBody>
       </p:sp>
       <p:sp>
         <p:nvSpPr>
@@ -2335,7 +2199,7 @@
           <a:bodyPr wrap="square" lIns="0" tIns="0" rIns="0" bIns="0" rtlCol="0" anchor="ctr"/>
           <a:lstStyle/>
           <a:p>
-            <a:pPr algn="ctr" indent="0" marL="0">
+            <a:pPr marL="0" indent="0" algn="ctr">
               <a:buNone/>
             </a:pPr>
             <a:r>
@@ -2374,6 +2238,13 @@
           </a:solidFill>
           <a:ln/>
         </p:spPr>
+        <p:txBody>
+          <a:bodyPr/>
+          <a:lstStyle/>
+          <a:p>
+            <a:endParaRPr lang="es-PE"/>
+          </a:p>
+        </p:txBody>
       </p:sp>
       <p:sp>
         <p:nvSpPr>
@@ -2396,7 +2267,7 @@
           <a:bodyPr wrap="square" lIns="0" tIns="0" rIns="0" bIns="0" rtlCol="0" anchor="ctr"/>
           <a:lstStyle/>
           <a:p>
-            <a:pPr algn="ctr" indent="0" marL="0">
+            <a:pPr marL="0" indent="0" algn="ctr">
               <a:buNone/>
             </a:pPr>
             <a:r>
@@ -2435,6 +2306,13 @@
           </a:solidFill>
           <a:ln/>
         </p:spPr>
+        <p:txBody>
+          <a:bodyPr/>
+          <a:lstStyle/>
+          <a:p>
+            <a:endParaRPr lang="es-PE"/>
+          </a:p>
+        </p:txBody>
       </p:sp>
       <p:sp>
         <p:nvSpPr>
@@ -2457,7 +2335,7 @@
           <a:bodyPr wrap="square" lIns="0" tIns="0" rIns="0" bIns="0" rtlCol="0" anchor="ctr"/>
           <a:lstStyle/>
           <a:p>
-            <a:pPr algn="ctr" indent="0" marL="0">
+            <a:pPr marL="0" indent="0" algn="ctr">
               <a:buNone/>
             </a:pPr>
             <a:r>
@@ -2496,6 +2374,13 @@
           </a:solidFill>
           <a:ln/>
         </p:spPr>
+        <p:txBody>
+          <a:bodyPr/>
+          <a:lstStyle/>
+          <a:p>
+            <a:endParaRPr lang="es-PE"/>
+          </a:p>
+        </p:txBody>
       </p:sp>
       <p:sp>
         <p:nvSpPr>
@@ -2518,7 +2403,7 @@
           <a:bodyPr wrap="square" lIns="0" tIns="0" rIns="0" bIns="0" rtlCol="0" anchor="ctr"/>
           <a:lstStyle/>
           <a:p>
-            <a:pPr algn="ctr" indent="0" marL="0">
+            <a:pPr marL="0" indent="0" algn="ctr">
               <a:buNone/>
             </a:pPr>
             <a:r>
@@ -2557,6 +2442,13 @@
           </a:solidFill>
           <a:ln/>
         </p:spPr>
+        <p:txBody>
+          <a:bodyPr/>
+          <a:lstStyle/>
+          <a:p>
+            <a:endParaRPr lang="es-PE"/>
+          </a:p>
+        </p:txBody>
       </p:sp>
       <p:sp>
         <p:nvSpPr>
@@ -2579,7 +2471,7 @@
           <a:bodyPr wrap="square" lIns="0" tIns="0" rIns="0" bIns="0" rtlCol="0" anchor="ctr"/>
           <a:lstStyle/>
           <a:p>
-            <a:pPr algn="ctr" indent="0" marL="0">
+            <a:pPr marL="0" indent="0" algn="ctr">
               <a:buNone/>
             </a:pPr>
             <a:r>
@@ -2618,7 +2510,7 @@
           <a:bodyPr wrap="square" lIns="0" tIns="0" rIns="0" bIns="0" rtlCol="0" anchor="ctr"/>
           <a:lstStyle/>
           <a:p>
-            <a:pPr indent="0" marL="0">
+            <a:pPr marL="0" indent="0">
               <a:buNone/>
             </a:pPr>
             <a:r>
@@ -2633,6 +2525,68 @@
               <a:t>Motor de Scoring · Curso de Arquitectura de Software</a:t>
             </a:r>
             <a:endParaRPr lang="en-US" sz="1100" dirty="0"/>
+          </a:p>
+        </p:txBody>
+      </p:sp>
+      <p:sp>
+        <p:nvSpPr>
+          <p:cNvPr id="22" name="Text 5">
+            <a:extLst>
+              <a:ext uri="{FF2B5EF4-FFF2-40B4-BE49-F238E27FC236}">
+                <a16:creationId xmlns:a16="http://schemas.microsoft.com/office/drawing/2014/main" id="{0B15606A-197A-D0FD-2C1D-FA6A4CC4D936}"/>
+              </a:ext>
+            </a:extLst>
+          </p:cNvPr>
+          <p:cNvSpPr txBox="1"/>
+          <p:nvPr/>
+        </p:nvSpPr>
+        <p:spPr>
+          <a:xfrm>
+            <a:off x="773255" y="5386676"/>
+            <a:ext cx="4598963" cy="731520"/>
+          </a:xfrm>
+          <a:prstGeom prst="rect">
+            <a:avLst/>
+          </a:prstGeom>
+          <a:noFill/>
+          <a:ln/>
+        </p:spPr>
+        <p:txBody>
+          <a:bodyPr wrap="square" lIns="0" tIns="0" rIns="0" bIns="0" rtlCol="0" anchor="ctr"/>
+          <a:lstStyle/>
+          <a:p>
+            <a:pPr marL="0" indent="0">
+              <a:buNone/>
+            </a:pPr>
+            <a:r>
+              <a:rPr lang="en-US" sz="1500" dirty="0">
+                <a:solidFill>
+                  <a:srgbClr val="C6D3EE"/>
+                </a:solidFill>
+                <a:latin typeface="Calibri" pitchFamily="34" charset="0"/>
+                <a:ea typeface="Calibri" pitchFamily="34" charset="-122"/>
+                <a:cs typeface="Calibri" pitchFamily="34" charset="-120"/>
+              </a:rPr>
+              <a:t>Integrantes:</a:t>
+            </a:r>
+            <a:endParaRPr lang="en-US" sz="1500" dirty="0"/>
+          </a:p>
+          <a:p>
+            <a:pPr marL="0" indent="0">
+              <a:buNone/>
+            </a:pPr>
+            <a:r>
+              <a:rPr lang="en-US" sz="1500" dirty="0">
+                <a:solidFill>
+                  <a:srgbClr val="C6D3EE"/>
+                </a:solidFill>
+                <a:latin typeface="Calibri" pitchFamily="34" charset="0"/>
+                <a:ea typeface="Calibri" pitchFamily="34" charset="-122"/>
+                <a:cs typeface="Calibri" pitchFamily="34" charset="-120"/>
+              </a:rPr>
+              <a:t>José Julca Díaz</a:t>
+            </a:r>
+            <a:endParaRPr lang="en-US" sz="1500" dirty="0"/>
           </a:p>
         </p:txBody>
       </p:sp>
@@ -2652,6 +2606,7 @@
         <a:solidFill>
           <a:srgbClr val="FFFFFF"/>
         </a:solidFill>
+        <a:effectLst/>
       </p:bgPr>
     </p:bg>
     <p:spTree>
@@ -2689,11 +2644,11 @@
           <a:bodyPr wrap="square" lIns="0" tIns="0" rIns="0" bIns="0" rtlCol="0" anchor="ctr"/>
           <a:lstStyle/>
           <a:p>
-            <a:pPr indent="0" marL="0">
-              <a:buNone/>
-            </a:pPr>
-            <a:r>
-              <a:rPr lang="en-US" sz="1300" b="1" spc="200" kern="0" dirty="0">
+            <a:pPr marL="0" indent="0">
+              <a:buNone/>
+            </a:pPr>
+            <a:r>
+              <a:rPr lang="en-US" sz="1300" b="1" kern="0" spc="200" dirty="0">
                 <a:solidFill>
                   <a:srgbClr val="0A58CA"/>
                 </a:solidFill>
@@ -2728,7 +2683,7 @@
           <a:bodyPr wrap="square" lIns="0" tIns="0" rIns="0" bIns="0" rtlCol="0" anchor="ctr"/>
           <a:lstStyle/>
           <a:p>
-            <a:pPr indent="0" marL="0">
+            <a:pPr marL="0" indent="0">
               <a:buNone/>
             </a:pPr>
             <a:r>
@@ -2767,6 +2722,13 @@
           </a:solidFill>
           <a:ln/>
         </p:spPr>
+        <p:txBody>
+          <a:bodyPr/>
+          <a:lstStyle/>
+          <a:p>
+            <a:endParaRPr lang="es-PE"/>
+          </a:p>
+        </p:txBody>
       </p:sp>
       <p:sp>
         <p:nvSpPr>
@@ -2789,7 +2751,7 @@
           <a:bodyPr wrap="square" lIns="0" tIns="0" rIns="0" bIns="0" rtlCol="0" anchor="ctr"/>
           <a:lstStyle/>
           <a:p>
-            <a:pPr indent="0" marL="0">
+            <a:pPr marL="0" indent="0">
               <a:buNone/>
             </a:pPr>
             <a:r>
@@ -2833,6 +2795,13 @@
             <a:prstDash val="solid"/>
           </a:ln>
         </p:spPr>
+        <p:txBody>
+          <a:bodyPr/>
+          <a:lstStyle/>
+          <a:p>
+            <a:endParaRPr lang="es-PE"/>
+          </a:p>
+        </p:txBody>
       </p:sp>
       <p:sp>
         <p:nvSpPr>
@@ -2961,6 +2930,13 @@
           </a:solidFill>
           <a:ln/>
         </p:spPr>
+        <p:txBody>
+          <a:bodyPr/>
+          <a:lstStyle/>
+          <a:p>
+            <a:endParaRPr lang="es-PE"/>
+          </a:p>
+        </p:txBody>
       </p:sp>
       <p:sp>
         <p:nvSpPr>
@@ -2983,7 +2959,7 @@
           <a:bodyPr wrap="square" lIns="0" tIns="0" rIns="0" bIns="0" rtlCol="0" anchor="ctr"/>
           <a:lstStyle/>
           <a:p>
-            <a:pPr indent="0" marL="0">
+            <a:pPr marL="0" indent="0">
               <a:buNone/>
             </a:pPr>
             <a:r>
@@ -3027,6 +3003,13 @@
             <a:prstDash val="solid"/>
           </a:ln>
         </p:spPr>
+        <p:txBody>
+          <a:bodyPr/>
+          <a:lstStyle/>
+          <a:p>
+            <a:endParaRPr lang="es-PE"/>
+          </a:p>
+        </p:txBody>
       </p:sp>
       <p:sp>
         <p:nvSpPr>
@@ -3155,6 +3138,13 @@
           </a:solidFill>
           <a:ln/>
         </p:spPr>
+        <p:txBody>
+          <a:bodyPr/>
+          <a:lstStyle/>
+          <a:p>
+            <a:endParaRPr lang="es-PE"/>
+          </a:p>
+        </p:txBody>
       </p:sp>
       <p:sp>
         <p:nvSpPr>
@@ -3177,7 +3167,7 @@
           <a:bodyPr wrap="square" lIns="0" tIns="0" rIns="0" bIns="0" rtlCol="0" anchor="ctr"/>
           <a:lstStyle/>
           <a:p>
-            <a:pPr indent="0" marL="0">
+            <a:pPr marL="0" indent="0">
               <a:buNone/>
             </a:pPr>
             <a:r>
@@ -3221,6 +3211,13 @@
             <a:prstDash val="solid"/>
           </a:ln>
         </p:spPr>
+        <p:txBody>
+          <a:bodyPr/>
+          <a:lstStyle/>
+          <a:p>
+            <a:endParaRPr lang="es-PE"/>
+          </a:p>
+        </p:txBody>
       </p:sp>
       <p:sp>
         <p:nvSpPr>
@@ -3328,6 +3325,13 @@
           </a:solidFill>
           <a:ln/>
         </p:spPr>
+        <p:txBody>
+          <a:bodyPr/>
+          <a:lstStyle/>
+          <a:p>
+            <a:endParaRPr lang="es-PE"/>
+          </a:p>
+        </p:txBody>
       </p:sp>
       <p:sp>
         <p:nvSpPr>
@@ -3350,7 +3354,7 @@
           <a:bodyPr wrap="square" lIns="0" tIns="0" rIns="0" bIns="0" rtlCol="0" anchor="ctr"/>
           <a:lstStyle/>
           <a:p>
-            <a:pPr indent="0" marL="0">
+            <a:pPr marL="0" indent="0">
               <a:buNone/>
             </a:pPr>
             <a:r>
@@ -3394,6 +3398,13 @@
             <a:prstDash val="solid"/>
           </a:ln>
         </p:spPr>
+        <p:txBody>
+          <a:bodyPr/>
+          <a:lstStyle/>
+          <a:p>
+            <a:endParaRPr lang="es-PE"/>
+          </a:p>
+        </p:txBody>
       </p:sp>
       <p:sp>
         <p:nvSpPr>
@@ -3416,7 +3427,7 @@
           <a:bodyPr wrap="square" lIns="0" tIns="0" rIns="0" bIns="0" rtlCol="0" anchor="ctr"/>
           <a:lstStyle/>
           <a:p>
-            <a:pPr algn="ctr" indent="0" marL="0">
+            <a:pPr marL="0" indent="0" algn="ctr">
               <a:buNone/>
             </a:pPr>
             <a:r>
@@ -3455,7 +3466,7 @@
           <a:bodyPr wrap="square" lIns="0" tIns="0" rIns="0" bIns="0" rtlCol="0" anchor="ctr"/>
           <a:lstStyle/>
           <a:p>
-            <a:pPr algn="r" indent="0" marL="0">
+            <a:pPr marL="0" indent="0" algn="r">
               <a:buNone/>
             </a:pPr>
             <a:r>
@@ -3489,6 +3500,7 @@
         <a:solidFill>
           <a:srgbClr val="FFFFFF"/>
         </a:solidFill>
+        <a:effectLst/>
       </p:bgPr>
     </p:bg>
     <p:spTree>
@@ -3526,11 +3538,11 @@
           <a:bodyPr wrap="square" lIns="0" tIns="0" rIns="0" bIns="0" rtlCol="0" anchor="ctr"/>
           <a:lstStyle/>
           <a:p>
-            <a:pPr indent="0" marL="0">
-              <a:buNone/>
-            </a:pPr>
-            <a:r>
-              <a:rPr lang="en-US" sz="1300" b="1" spc="200" kern="0" dirty="0">
+            <a:pPr marL="0" indent="0">
+              <a:buNone/>
+            </a:pPr>
+            <a:r>
+              <a:rPr lang="en-US" sz="1300" b="1" kern="0" spc="200" dirty="0">
                 <a:solidFill>
                   <a:srgbClr val="0A58CA"/>
                 </a:solidFill>
@@ -3565,7 +3577,7 @@
           <a:bodyPr wrap="square" lIns="0" tIns="0" rIns="0" bIns="0" rtlCol="0" anchor="ctr"/>
           <a:lstStyle/>
           <a:p>
-            <a:pPr indent="0" marL="0">
+            <a:pPr marL="0" indent="0">
               <a:buNone/>
             </a:pPr>
             <a:r>
@@ -3604,6 +3616,13 @@
           </a:solidFill>
           <a:ln/>
         </p:spPr>
+        <p:txBody>
+          <a:bodyPr/>
+          <a:lstStyle/>
+          <a:p>
+            <a:endParaRPr lang="es-PE"/>
+          </a:p>
+        </p:txBody>
       </p:sp>
       <p:sp>
         <p:nvSpPr>
@@ -3626,7 +3645,7 @@
           <a:bodyPr wrap="square" lIns="0" tIns="0" rIns="0" bIns="0" rtlCol="0" anchor="ctr"/>
           <a:lstStyle/>
           <a:p>
-            <a:pPr indent="0" marL="0">
+            <a:pPr marL="0" indent="0">
               <a:buNone/>
             </a:pPr>
             <a:r>
@@ -3670,6 +3689,13 @@
             <a:prstDash val="solid"/>
           </a:ln>
         </p:spPr>
+        <p:txBody>
+          <a:bodyPr/>
+          <a:lstStyle/>
+          <a:p>
+            <a:endParaRPr lang="es-PE"/>
+          </a:p>
+        </p:txBody>
       </p:sp>
       <p:sp>
         <p:nvSpPr>
@@ -3798,6 +3824,13 @@
           </a:solidFill>
           <a:ln/>
         </p:spPr>
+        <p:txBody>
+          <a:bodyPr/>
+          <a:lstStyle/>
+          <a:p>
+            <a:endParaRPr lang="es-PE"/>
+          </a:p>
+        </p:txBody>
       </p:sp>
       <p:sp>
         <p:nvSpPr>
@@ -3820,7 +3853,7 @@
           <a:bodyPr wrap="square" lIns="0" tIns="0" rIns="0" bIns="0" rtlCol="0" anchor="ctr"/>
           <a:lstStyle/>
           <a:p>
-            <a:pPr algn="ctr" indent="0" marL="0">
+            <a:pPr marL="0" indent="0" algn="ctr">
               <a:buNone/>
             </a:pPr>
             <a:r>
@@ -3859,6 +3892,13 @@
           </a:solidFill>
           <a:ln/>
         </p:spPr>
+        <p:txBody>
+          <a:bodyPr/>
+          <a:lstStyle/>
+          <a:p>
+            <a:endParaRPr lang="es-PE"/>
+          </a:p>
+        </p:txBody>
       </p:sp>
       <p:sp>
         <p:nvSpPr>
@@ -3881,7 +3921,7 @@
           <a:bodyPr wrap="square" lIns="0" tIns="0" rIns="0" bIns="0" rtlCol="0" anchor="ctr"/>
           <a:lstStyle/>
           <a:p>
-            <a:pPr indent="0" marL="0">
+            <a:pPr marL="0" indent="0">
               <a:buNone/>
             </a:pPr>
             <a:r>
@@ -3925,6 +3965,13 @@
             <a:prstDash val="solid"/>
           </a:ln>
         </p:spPr>
+        <p:txBody>
+          <a:bodyPr/>
+          <a:lstStyle/>
+          <a:p>
+            <a:endParaRPr lang="es-PE"/>
+          </a:p>
+        </p:txBody>
       </p:sp>
       <p:sp>
         <p:nvSpPr>
@@ -3952,6 +3999,13 @@
             <a:prstDash val="solid"/>
           </a:ln>
         </p:spPr>
+        <p:txBody>
+          <a:bodyPr/>
+          <a:lstStyle/>
+          <a:p>
+            <a:endParaRPr lang="es-PE"/>
+          </a:p>
+        </p:txBody>
       </p:sp>
       <p:sp>
         <p:nvSpPr>
@@ -3974,7 +4028,7 @@
           <a:bodyPr wrap="square" lIns="0" tIns="0" rIns="0" bIns="0" rtlCol="0" anchor="b"/>
           <a:lstStyle/>
           <a:p>
-            <a:pPr algn="ctr" indent="0" marL="0">
+            <a:pPr marL="0" indent="0" algn="ctr">
               <a:buNone/>
             </a:pPr>
             <a:r>
@@ -4013,7 +4067,7 @@
           <a:bodyPr wrap="square" lIns="0" tIns="0" rIns="0" bIns="0" rtlCol="0" anchor="t"/>
           <a:lstStyle/>
           <a:p>
-            <a:pPr algn="ctr" indent="0" marL="0">
+            <a:pPr marL="0" indent="0" algn="ctr">
               <a:buNone/>
             </a:pPr>
             <a:r>
@@ -4057,6 +4111,13 @@
             <a:prstDash val="solid"/>
           </a:ln>
         </p:spPr>
+        <p:txBody>
+          <a:bodyPr/>
+          <a:lstStyle/>
+          <a:p>
+            <a:endParaRPr lang="es-PE"/>
+          </a:p>
+        </p:txBody>
       </p:sp>
       <p:sp>
         <p:nvSpPr>
@@ -4079,7 +4140,7 @@
           <a:bodyPr wrap="square" lIns="0" tIns="0" rIns="0" bIns="0" rtlCol="0" anchor="b"/>
           <a:lstStyle/>
           <a:p>
-            <a:pPr algn="ctr" indent="0" marL="0">
+            <a:pPr marL="0" indent="0" algn="ctr">
               <a:buNone/>
             </a:pPr>
             <a:r>
@@ -4118,7 +4179,7 @@
           <a:bodyPr wrap="square" lIns="0" tIns="0" rIns="0" bIns="0" rtlCol="0" anchor="t"/>
           <a:lstStyle/>
           <a:p>
-            <a:pPr algn="ctr" indent="0" marL="0">
+            <a:pPr marL="0" indent="0" algn="ctr">
               <a:buNone/>
             </a:pPr>
             <a:r>
@@ -4157,6 +4218,13 @@
           </a:solidFill>
           <a:ln/>
         </p:spPr>
+        <p:txBody>
+          <a:bodyPr/>
+          <a:lstStyle/>
+          <a:p>
+            <a:endParaRPr lang="es-PE"/>
+          </a:p>
+        </p:txBody>
       </p:sp>
       <p:sp>
         <p:nvSpPr>
@@ -4179,7 +4247,7 @@
           <a:bodyPr wrap="square" lIns="0" tIns="0" rIns="0" bIns="0" rtlCol="0" anchor="ctr"/>
           <a:lstStyle/>
           <a:p>
-            <a:pPr algn="ctr" indent="0" marL="0">
+            <a:pPr marL="0" indent="0" algn="ctr">
               <a:buNone/>
             </a:pPr>
             <a:r>
@@ -4218,7 +4286,7 @@
           <a:bodyPr wrap="square" lIns="0" tIns="0" rIns="0" bIns="0" rtlCol="0" anchor="ctr"/>
           <a:lstStyle/>
           <a:p>
-            <a:pPr algn="r" indent="0" marL="0">
+            <a:pPr marL="0" indent="0" algn="r">
               <a:buNone/>
             </a:pPr>
             <a:r>
@@ -4252,6 +4320,7 @@
         <a:solidFill>
           <a:srgbClr val="FFFFFF"/>
         </a:solidFill>
+        <a:effectLst/>
       </p:bgPr>
     </p:bg>
     <p:spTree>
@@ -4289,11 +4358,11 @@
           <a:bodyPr wrap="square" lIns="0" tIns="0" rIns="0" bIns="0" rtlCol="0" anchor="ctr"/>
           <a:lstStyle/>
           <a:p>
-            <a:pPr indent="0" marL="0">
-              <a:buNone/>
-            </a:pPr>
-            <a:r>
-              <a:rPr lang="en-US" sz="1300" b="1" spc="200" kern="0" dirty="0">
+            <a:pPr marL="0" indent="0">
+              <a:buNone/>
+            </a:pPr>
+            <a:r>
+              <a:rPr lang="en-US" sz="1300" b="1" kern="0" spc="200" dirty="0">
                 <a:solidFill>
                   <a:srgbClr val="0A58CA"/>
                 </a:solidFill>
@@ -4328,7 +4397,7 @@
           <a:bodyPr wrap="square" lIns="0" tIns="0" rIns="0" bIns="0" rtlCol="0" anchor="ctr"/>
           <a:lstStyle/>
           <a:p>
-            <a:pPr indent="0" marL="0">
+            <a:pPr marL="0" indent="0">
               <a:buNone/>
             </a:pPr>
             <a:r>
@@ -4372,6 +4441,13 @@
             <a:prstDash val="solid"/>
           </a:ln>
         </p:spPr>
+        <p:txBody>
+          <a:bodyPr/>
+          <a:lstStyle/>
+          <a:p>
+            <a:endParaRPr lang="es-PE"/>
+          </a:p>
+        </p:txBody>
       </p:sp>
       <p:sp>
         <p:nvSpPr>
@@ -4394,7 +4470,7 @@
           <a:bodyPr wrap="square" lIns="0" tIns="0" rIns="0" bIns="0" rtlCol="0" anchor="ctr"/>
           <a:lstStyle/>
           <a:p>
-            <a:pPr algn="ctr" indent="0" marL="0">
+            <a:pPr marL="0" indent="0" algn="ctr">
               <a:buNone/>
             </a:pPr>
             <a:r>
@@ -4435,6 +4511,13 @@
             <a:tailEnd type="triangle"/>
           </a:ln>
         </p:spPr>
+        <p:txBody>
+          <a:bodyPr/>
+          <a:lstStyle/>
+          <a:p>
+            <a:endParaRPr lang="es-PE"/>
+          </a:p>
+        </p:txBody>
       </p:sp>
       <p:sp>
         <p:nvSpPr>
@@ -4462,6 +4545,13 @@
             <a:prstDash val="solid"/>
           </a:ln>
         </p:spPr>
+        <p:txBody>
+          <a:bodyPr/>
+          <a:lstStyle/>
+          <a:p>
+            <a:endParaRPr lang="es-PE"/>
+          </a:p>
+        </p:txBody>
       </p:sp>
       <p:sp>
         <p:nvSpPr>
@@ -4484,7 +4574,7 @@
           <a:bodyPr wrap="square" lIns="0" tIns="0" rIns="0" bIns="0" rtlCol="0" anchor="ctr"/>
           <a:lstStyle/>
           <a:p>
-            <a:pPr algn="ctr" indent="0" marL="0">
+            <a:pPr marL="0" indent="0" algn="ctr">
               <a:buNone/>
             </a:pPr>
             <a:r>
@@ -4525,6 +4615,13 @@
             <a:tailEnd type="triangle"/>
           </a:ln>
         </p:spPr>
+        <p:txBody>
+          <a:bodyPr/>
+          <a:lstStyle/>
+          <a:p>
+            <a:endParaRPr lang="es-PE"/>
+          </a:p>
+        </p:txBody>
       </p:sp>
       <p:sp>
         <p:nvSpPr>
@@ -4552,6 +4649,13 @@
             <a:prstDash val="solid"/>
           </a:ln>
         </p:spPr>
+        <p:txBody>
+          <a:bodyPr/>
+          <a:lstStyle/>
+          <a:p>
+            <a:endParaRPr lang="es-PE"/>
+          </a:p>
+        </p:txBody>
       </p:sp>
       <p:sp>
         <p:nvSpPr>
@@ -4574,7 +4678,7 @@
           <a:bodyPr wrap="square" lIns="0" tIns="0" rIns="0" bIns="0" rtlCol="0" anchor="ctr"/>
           <a:lstStyle/>
           <a:p>
-            <a:pPr algn="ctr" indent="0" marL="0">
+            <a:pPr marL="0" indent="0" algn="ctr">
               <a:buNone/>
             </a:pPr>
             <a:r>
@@ -4615,6 +4719,13 @@
             <a:tailEnd type="triangle"/>
           </a:ln>
         </p:spPr>
+        <p:txBody>
+          <a:bodyPr/>
+          <a:lstStyle/>
+          <a:p>
+            <a:endParaRPr lang="es-PE"/>
+          </a:p>
+        </p:txBody>
       </p:sp>
       <p:sp>
         <p:nvSpPr>
@@ -4639,6 +4750,13 @@
             <a:tailEnd type="triangle"/>
           </a:ln>
         </p:spPr>
+        <p:txBody>
+          <a:bodyPr/>
+          <a:lstStyle/>
+          <a:p>
+            <a:endParaRPr lang="es-PE"/>
+          </a:p>
+        </p:txBody>
       </p:sp>
       <p:sp>
         <p:nvSpPr>
@@ -4666,6 +4784,13 @@
             <a:prstDash val="solid"/>
           </a:ln>
         </p:spPr>
+        <p:txBody>
+          <a:bodyPr/>
+          <a:lstStyle/>
+          <a:p>
+            <a:endParaRPr lang="es-PE"/>
+          </a:p>
+        </p:txBody>
       </p:sp>
       <p:sp>
         <p:nvSpPr>
@@ -4688,7 +4813,7 @@
           <a:bodyPr wrap="square" lIns="0" tIns="0" rIns="0" bIns="0" rtlCol="0" anchor="b"/>
           <a:lstStyle/>
           <a:p>
-            <a:pPr algn="ctr" indent="0" marL="0">
+            <a:pPr marL="0" indent="0" algn="ctr">
               <a:buNone/>
             </a:pPr>
             <a:r>
@@ -4727,7 +4852,7 @@
           <a:bodyPr wrap="square" lIns="0" tIns="0" rIns="0" bIns="0" rtlCol="0" anchor="t"/>
           <a:lstStyle/>
           <a:p>
-            <a:pPr algn="ctr" indent="0" marL="0">
+            <a:pPr marL="0" indent="0" algn="ctr">
               <a:buNone/>
             </a:pPr>
             <a:r>
@@ -4771,6 +4896,13 @@
             <a:prstDash val="solid"/>
           </a:ln>
         </p:spPr>
+        <p:txBody>
+          <a:bodyPr/>
+          <a:lstStyle/>
+          <a:p>
+            <a:endParaRPr lang="es-PE"/>
+          </a:p>
+        </p:txBody>
       </p:sp>
       <p:sp>
         <p:nvSpPr>
@@ -4793,7 +4925,7 @@
           <a:bodyPr wrap="square" lIns="0" tIns="0" rIns="0" bIns="0" rtlCol="0" anchor="b"/>
           <a:lstStyle/>
           <a:p>
-            <a:pPr algn="ctr" indent="0" marL="0">
+            <a:pPr marL="0" indent="0" algn="ctr">
               <a:buNone/>
             </a:pPr>
             <a:r>
@@ -4832,7 +4964,7 @@
           <a:bodyPr wrap="square" lIns="0" tIns="0" rIns="0" bIns="0" rtlCol="0" anchor="t"/>
           <a:lstStyle/>
           <a:p>
-            <a:pPr algn="ctr" indent="0" marL="0">
+            <a:pPr marL="0" indent="0" algn="ctr">
               <a:buNone/>
             </a:pPr>
             <a:r>
@@ -4871,7 +5003,7 @@
           <a:bodyPr wrap="square" lIns="0" tIns="0" rIns="0" bIns="0" rtlCol="0" anchor="ctr"/>
           <a:lstStyle/>
           <a:p>
-            <a:pPr indent="0" marL="0">
+            <a:pPr marL="0" indent="0">
               <a:buNone/>
             </a:pPr>
             <a:r>
@@ -4910,6 +5042,13 @@
           </a:solidFill>
           <a:ln/>
         </p:spPr>
+        <p:txBody>
+          <a:bodyPr/>
+          <a:lstStyle/>
+          <a:p>
+            <a:endParaRPr lang="es-PE"/>
+          </a:p>
+        </p:txBody>
       </p:sp>
       <p:sp>
         <p:nvSpPr>
@@ -4932,7 +5071,7 @@
           <a:bodyPr wrap="square" lIns="0" tIns="0" rIns="0" bIns="0" rtlCol="0" anchor="ctr"/>
           <a:lstStyle/>
           <a:p>
-            <a:pPr indent="0" marL="0">
+            <a:pPr marL="0" indent="0">
               <a:buNone/>
             </a:pPr>
             <a:r>
@@ -4976,6 +5115,13 @@
             <a:prstDash val="solid"/>
           </a:ln>
         </p:spPr>
+        <p:txBody>
+          <a:bodyPr/>
+          <a:lstStyle/>
+          <a:p>
+            <a:endParaRPr lang="es-PE"/>
+          </a:p>
+        </p:txBody>
       </p:sp>
       <p:sp>
         <p:nvSpPr>
@@ -4998,7 +5144,7 @@
           <a:bodyPr wrap="square" lIns="0" tIns="0" rIns="0" bIns="0" rtlCol="0" anchor="ctr"/>
           <a:lstStyle/>
           <a:p>
-            <a:pPr indent="0" marL="0">
+            <a:pPr marL="0" indent="0">
               <a:buNone/>
             </a:pPr>
             <a:r>
@@ -5013,7 +5159,7 @@
             <a:endParaRPr lang="en-US" sz="1150" dirty="0"/>
           </a:p>
           <a:p>
-            <a:pPr indent="0" marL="0">
+            <a:pPr marL="0" indent="0">
               <a:buNone/>
             </a:pPr>
             <a:r>
@@ -5028,7 +5174,7 @@
             <a:endParaRPr lang="en-US" sz="1150" dirty="0"/>
           </a:p>
           <a:p>
-            <a:pPr indent="0" marL="0">
+            <a:pPr marL="0" indent="0">
               <a:buNone/>
             </a:pPr>
             <a:r>
@@ -5043,7 +5189,7 @@
             <a:endParaRPr lang="en-US" sz="1150" dirty="0"/>
           </a:p>
           <a:p>
-            <a:pPr indent="0" marL="0">
+            <a:pPr marL="0" indent="0">
               <a:buNone/>
             </a:pPr>
             <a:r>
@@ -5079,6 +5225,13 @@
           </a:solidFill>
           <a:ln/>
         </p:spPr>
+        <p:txBody>
+          <a:bodyPr/>
+          <a:lstStyle/>
+          <a:p>
+            <a:endParaRPr lang="es-PE"/>
+          </a:p>
+        </p:txBody>
       </p:sp>
       <p:sp>
         <p:nvSpPr>
@@ -5101,7 +5254,7 @@
           <a:bodyPr wrap="square" lIns="0" tIns="0" rIns="0" bIns="0" rtlCol="0" anchor="ctr"/>
           <a:lstStyle/>
           <a:p>
-            <a:pPr indent="0" marL="0">
+            <a:pPr marL="0" indent="0">
               <a:buNone/>
             </a:pPr>
             <a:r>
@@ -5145,6 +5298,13 @@
             <a:prstDash val="solid"/>
           </a:ln>
         </p:spPr>
+        <p:txBody>
+          <a:bodyPr/>
+          <a:lstStyle/>
+          <a:p>
+            <a:endParaRPr lang="es-PE"/>
+          </a:p>
+        </p:txBody>
       </p:sp>
       <p:sp>
         <p:nvSpPr>
@@ -5252,7 +5412,7 @@
           <a:bodyPr wrap="square" lIns="0" tIns="0" rIns="0" bIns="0" rtlCol="0" anchor="ctr"/>
           <a:lstStyle/>
           <a:p>
-            <a:pPr algn="r" indent="0" marL="0">
+            <a:pPr marL="0" indent="0" algn="r">
               <a:buNone/>
             </a:pPr>
             <a:r>
@@ -5286,6 +5446,7 @@
         <a:solidFill>
           <a:srgbClr val="FFFFFF"/>
         </a:solidFill>
+        <a:effectLst/>
       </p:bgPr>
     </p:bg>
     <p:spTree>
@@ -5323,11 +5484,11 @@
           <a:bodyPr wrap="square" lIns="0" tIns="0" rIns="0" bIns="0" rtlCol="0" anchor="ctr"/>
           <a:lstStyle/>
           <a:p>
-            <a:pPr indent="0" marL="0">
-              <a:buNone/>
-            </a:pPr>
-            <a:r>
-              <a:rPr lang="en-US" sz="1300" b="1" spc="200" kern="0" dirty="0">
+            <a:pPr marL="0" indent="0">
+              <a:buNone/>
+            </a:pPr>
+            <a:r>
+              <a:rPr lang="en-US" sz="1300" b="1" kern="0" spc="200" dirty="0">
                 <a:solidFill>
                   <a:srgbClr val="0A58CA"/>
                 </a:solidFill>
@@ -5362,7 +5523,7 @@
           <a:bodyPr wrap="square" lIns="0" tIns="0" rIns="0" bIns="0" rtlCol="0" anchor="ctr"/>
           <a:lstStyle/>
           <a:p>
-            <a:pPr indent="0" marL="0">
+            <a:pPr marL="0" indent="0">
               <a:buNone/>
             </a:pPr>
             <a:r>
@@ -5401,6 +5562,13 @@
           </a:solidFill>
           <a:ln/>
         </p:spPr>
+        <p:txBody>
+          <a:bodyPr/>
+          <a:lstStyle/>
+          <a:p>
+            <a:endParaRPr lang="es-PE"/>
+          </a:p>
+        </p:txBody>
       </p:sp>
       <p:sp>
         <p:nvSpPr>
@@ -5423,7 +5591,7 @@
           <a:bodyPr wrap="square" lIns="0" tIns="0" rIns="0" bIns="0" rtlCol="0" anchor="ctr"/>
           <a:lstStyle/>
           <a:p>
-            <a:pPr indent="0" marL="0">
+            <a:pPr marL="0" indent="0">
               <a:buNone/>
             </a:pPr>
             <a:r>
@@ -5467,6 +5635,13 @@
             <a:prstDash val="solid"/>
           </a:ln>
         </p:spPr>
+        <p:txBody>
+          <a:bodyPr/>
+          <a:lstStyle/>
+          <a:p>
+            <a:endParaRPr lang="es-PE"/>
+          </a:p>
+        </p:txBody>
       </p:sp>
       <p:sp>
         <p:nvSpPr>
@@ -5595,6 +5770,13 @@
           </a:solidFill>
           <a:ln/>
         </p:spPr>
+        <p:txBody>
+          <a:bodyPr/>
+          <a:lstStyle/>
+          <a:p>
+            <a:endParaRPr lang="es-PE"/>
+          </a:p>
+        </p:txBody>
       </p:sp>
       <p:sp>
         <p:nvSpPr>
@@ -5617,7 +5799,7 @@
           <a:bodyPr wrap="square" lIns="0" tIns="0" rIns="0" bIns="0" rtlCol="0" anchor="ctr"/>
           <a:lstStyle/>
           <a:p>
-            <a:pPr indent="0" marL="0">
+            <a:pPr marL="0" indent="0">
               <a:buNone/>
             </a:pPr>
             <a:r>
@@ -5661,6 +5843,13 @@
             <a:prstDash val="solid"/>
           </a:ln>
         </p:spPr>
+        <p:txBody>
+          <a:bodyPr/>
+          <a:lstStyle/>
+          <a:p>
+            <a:endParaRPr lang="es-PE"/>
+          </a:p>
+        </p:txBody>
       </p:sp>
       <p:sp>
         <p:nvSpPr>
@@ -5768,6 +5957,13 @@
           </a:solidFill>
           <a:ln/>
         </p:spPr>
+        <p:txBody>
+          <a:bodyPr/>
+          <a:lstStyle/>
+          <a:p>
+            <a:endParaRPr lang="es-PE"/>
+          </a:p>
+        </p:txBody>
       </p:sp>
       <p:sp>
         <p:nvSpPr>
@@ -5790,7 +5986,7 @@
           <a:bodyPr wrap="square" lIns="0" tIns="0" rIns="0" bIns="0" rtlCol="0" anchor="ctr"/>
           <a:lstStyle/>
           <a:p>
-            <a:pPr indent="0" marL="0">
+            <a:pPr marL="0" indent="0">
               <a:buNone/>
             </a:pPr>
             <a:r>
@@ -5834,6 +6030,13 @@
             <a:prstDash val="solid"/>
           </a:ln>
         </p:spPr>
+        <p:txBody>
+          <a:bodyPr/>
+          <a:lstStyle/>
+          <a:p>
+            <a:endParaRPr lang="es-PE"/>
+          </a:p>
+        </p:txBody>
       </p:sp>
       <p:sp>
         <p:nvSpPr>
@@ -5962,6 +6165,13 @@
           </a:solidFill>
           <a:ln/>
         </p:spPr>
+        <p:txBody>
+          <a:bodyPr/>
+          <a:lstStyle/>
+          <a:p>
+            <a:endParaRPr lang="es-PE"/>
+          </a:p>
+        </p:txBody>
       </p:sp>
       <p:sp>
         <p:nvSpPr>
@@ -5984,7 +6194,7 @@
           <a:bodyPr wrap="square" lIns="0" tIns="0" rIns="0" bIns="0" rtlCol="0" anchor="ctr"/>
           <a:lstStyle/>
           <a:p>
-            <a:pPr algn="ctr" indent="0" marL="0">
+            <a:pPr marL="0" indent="0" algn="ctr">
               <a:buNone/>
             </a:pPr>
             <a:r>
@@ -6023,7 +6233,7 @@
           <a:bodyPr wrap="square" lIns="0" tIns="0" rIns="0" bIns="0" rtlCol="0" anchor="ctr"/>
           <a:lstStyle/>
           <a:p>
-            <a:pPr algn="r" indent="0" marL="0">
+            <a:pPr marL="0" indent="0" algn="r">
               <a:buNone/>
             </a:pPr>
             <a:r>
@@ -6057,6 +6267,7 @@
         <a:solidFill>
           <a:srgbClr val="082F67"/>
         </a:solidFill>
+        <a:effectLst/>
       </p:bgPr>
     </p:bg>
     <p:spTree>
@@ -6092,6 +6303,13 @@
           </a:solidFill>
           <a:ln/>
         </p:spPr>
+        <p:txBody>
+          <a:bodyPr/>
+          <a:lstStyle/>
+          <a:p>
+            <a:endParaRPr lang="es-PE"/>
+          </a:p>
+        </p:txBody>
       </p:sp>
       <p:sp>
         <p:nvSpPr>
@@ -6114,11 +6332,11 @@
           <a:bodyPr wrap="square" lIns="0" tIns="0" rIns="0" bIns="0" rtlCol="0" anchor="ctr"/>
           <a:lstStyle/>
           <a:p>
-            <a:pPr indent="0" marL="0">
-              <a:buNone/>
-            </a:pPr>
-            <a:r>
-              <a:rPr lang="en-US" sz="1300" b="1" spc="200" kern="0" dirty="0">
+            <a:pPr marL="0" indent="0">
+              <a:buNone/>
+            </a:pPr>
+            <a:r>
+              <a:rPr lang="en-US" sz="1300" b="1" kern="0" spc="200" dirty="0">
                 <a:solidFill>
                   <a:srgbClr val="00C2A8"/>
                 </a:solidFill>
@@ -6153,7 +6371,7 @@
           <a:bodyPr wrap="square" lIns="0" tIns="0" rIns="0" bIns="0" rtlCol="0" anchor="ctr"/>
           <a:lstStyle/>
           <a:p>
-            <a:pPr indent="0" marL="0">
+            <a:pPr marL="0" indent="0">
               <a:buNone/>
             </a:pPr>
             <a:r>
@@ -6190,6 +6408,13 @@
           </a:solidFill>
           <a:ln/>
         </p:spPr>
+        <p:txBody>
+          <a:bodyPr/>
+          <a:lstStyle/>
+          <a:p>
+            <a:endParaRPr lang="es-PE"/>
+          </a:p>
+        </p:txBody>
       </p:sp>
       <p:sp>
         <p:nvSpPr>
@@ -6212,7 +6437,7 @@
           <a:bodyPr wrap="square" lIns="0" tIns="0" rIns="0" bIns="0" rtlCol="0" anchor="ctr"/>
           <a:lstStyle/>
           <a:p>
-            <a:pPr algn="ctr" indent="0" marL="0">
+            <a:pPr marL="0" indent="0" algn="ctr">
               <a:buNone/>
             </a:pPr>
             <a:r>
@@ -6251,7 +6476,7 @@
           <a:bodyPr wrap="square" lIns="0" tIns="0" rIns="0" bIns="0" rtlCol="0" anchor="ctr"/>
           <a:lstStyle/>
           <a:p>
-            <a:pPr indent="0" marL="0">
+            <a:pPr marL="0" indent="0">
               <a:buNone/>
             </a:pPr>
             <a:r>
@@ -6288,6 +6513,13 @@
           </a:solidFill>
           <a:ln/>
         </p:spPr>
+        <p:txBody>
+          <a:bodyPr/>
+          <a:lstStyle/>
+          <a:p>
+            <a:endParaRPr lang="es-PE"/>
+          </a:p>
+        </p:txBody>
       </p:sp>
       <p:sp>
         <p:nvSpPr>
@@ -6310,7 +6542,7 @@
           <a:bodyPr wrap="square" lIns="0" tIns="0" rIns="0" bIns="0" rtlCol="0" anchor="ctr"/>
           <a:lstStyle/>
           <a:p>
-            <a:pPr algn="ctr" indent="0" marL="0">
+            <a:pPr marL="0" indent="0" algn="ctr">
               <a:buNone/>
             </a:pPr>
             <a:r>
@@ -6349,7 +6581,7 @@
           <a:bodyPr wrap="square" lIns="0" tIns="0" rIns="0" bIns="0" rtlCol="0" anchor="ctr"/>
           <a:lstStyle/>
           <a:p>
-            <a:pPr indent="0" marL="0">
+            <a:pPr marL="0" indent="0">
               <a:buNone/>
             </a:pPr>
             <a:r>
@@ -6386,6 +6618,13 @@
           </a:solidFill>
           <a:ln/>
         </p:spPr>
+        <p:txBody>
+          <a:bodyPr/>
+          <a:lstStyle/>
+          <a:p>
+            <a:endParaRPr lang="es-PE"/>
+          </a:p>
+        </p:txBody>
       </p:sp>
       <p:sp>
         <p:nvSpPr>
@@ -6408,7 +6647,7 @@
           <a:bodyPr wrap="square" lIns="0" tIns="0" rIns="0" bIns="0" rtlCol="0" anchor="ctr"/>
           <a:lstStyle/>
           <a:p>
-            <a:pPr algn="ctr" indent="0" marL="0">
+            <a:pPr marL="0" indent="0" algn="ctr">
               <a:buNone/>
             </a:pPr>
             <a:r>
@@ -6447,7 +6686,7 @@
           <a:bodyPr wrap="square" lIns="0" tIns="0" rIns="0" bIns="0" rtlCol="0" anchor="ctr"/>
           <a:lstStyle/>
           <a:p>
-            <a:pPr indent="0" marL="0">
+            <a:pPr marL="0" indent="0">
               <a:buNone/>
             </a:pPr>
             <a:r>
@@ -6484,6 +6723,13 @@
           </a:solidFill>
           <a:ln/>
         </p:spPr>
+        <p:txBody>
+          <a:bodyPr/>
+          <a:lstStyle/>
+          <a:p>
+            <a:endParaRPr lang="es-PE"/>
+          </a:p>
+        </p:txBody>
       </p:sp>
       <p:sp>
         <p:nvSpPr>
@@ -6506,7 +6752,7 @@
           <a:bodyPr wrap="square" lIns="0" tIns="0" rIns="0" bIns="0" rtlCol="0" anchor="ctr"/>
           <a:lstStyle/>
           <a:p>
-            <a:pPr algn="ctr" indent="0" marL="0">
+            <a:pPr marL="0" indent="0" algn="ctr">
               <a:buNone/>
             </a:pPr>
             <a:r>
@@ -6545,7 +6791,7 @@
           <a:bodyPr wrap="square" lIns="0" tIns="0" rIns="0" bIns="0" rtlCol="0" anchor="ctr"/>
           <a:lstStyle/>
           <a:p>
-            <a:pPr indent="0" marL="0">
+            <a:pPr marL="0" indent="0">
               <a:buNone/>
             </a:pPr>
             <a:r>
@@ -6582,6 +6828,13 @@
           </a:solidFill>
           <a:ln/>
         </p:spPr>
+        <p:txBody>
+          <a:bodyPr/>
+          <a:lstStyle/>
+          <a:p>
+            <a:endParaRPr lang="es-PE"/>
+          </a:p>
+        </p:txBody>
       </p:sp>
       <p:sp>
         <p:nvSpPr>
@@ -6604,7 +6857,7 @@
           <a:bodyPr wrap="square" lIns="0" tIns="0" rIns="0" bIns="0" rtlCol="0" anchor="ctr"/>
           <a:lstStyle/>
           <a:p>
-            <a:pPr algn="ctr" indent="0" marL="0">
+            <a:pPr marL="0" indent="0" algn="ctr">
               <a:buNone/>
             </a:pPr>
             <a:r>
@@ -6643,7 +6896,7 @@
           <a:bodyPr wrap="square" lIns="0" tIns="0" rIns="0" bIns="0" rtlCol="0" anchor="ctr"/>
           <a:lstStyle/>
           <a:p>
-            <a:pPr indent="0" marL="0">
+            <a:pPr marL="0" indent="0">
               <a:buNone/>
             </a:pPr>
             <a:r>
@@ -6680,6 +6933,13 @@
           </a:solidFill>
           <a:ln/>
         </p:spPr>
+        <p:txBody>
+          <a:bodyPr/>
+          <a:lstStyle/>
+          <a:p>
+            <a:endParaRPr lang="es-PE"/>
+          </a:p>
+        </p:txBody>
       </p:sp>
       <p:sp>
         <p:nvSpPr>
@@ -6702,7 +6962,7 @@
           <a:bodyPr wrap="square" lIns="0" tIns="0" rIns="0" bIns="0" rtlCol="0" anchor="ctr"/>
           <a:lstStyle/>
           <a:p>
-            <a:pPr algn="ctr" indent="0" marL="0">
+            <a:pPr marL="0" indent="0" algn="ctr">
               <a:buNone/>
             </a:pPr>
             <a:r>
@@ -6741,7 +7001,7 @@
           <a:bodyPr wrap="square" lIns="0" tIns="0" rIns="0" bIns="0" rtlCol="0" anchor="ctr"/>
           <a:lstStyle/>
           <a:p>
-            <a:pPr indent="0" marL="0">
+            <a:pPr marL="0" indent="0">
               <a:buNone/>
             </a:pPr>
             <a:r>
@@ -6780,7 +7040,7 @@
           <a:bodyPr wrap="square" lIns="0" tIns="0" rIns="0" bIns="0" rtlCol="0" anchor="ctr"/>
           <a:lstStyle/>
           <a:p>
-            <a:pPr indent="0" marL="0">
+            <a:pPr marL="0" indent="0">
               <a:buNone/>
             </a:pPr>
             <a:r>
@@ -6814,6 +7074,7 @@
         <a:solidFill>
           <a:srgbClr val="FFFFFF"/>
         </a:solidFill>
+        <a:effectLst/>
       </p:bgPr>
     </p:bg>
     <p:spTree>
@@ -6851,11 +7112,11 @@
           <a:bodyPr wrap="square" lIns="0" tIns="0" rIns="0" bIns="0" rtlCol="0" anchor="ctr"/>
           <a:lstStyle/>
           <a:p>
-            <a:pPr indent="0" marL="0">
-              <a:buNone/>
-            </a:pPr>
-            <a:r>
-              <a:rPr lang="en-US" sz="1300" b="1" spc="200" kern="0" dirty="0">
+            <a:pPr marL="0" indent="0">
+              <a:buNone/>
+            </a:pPr>
+            <a:r>
+              <a:rPr lang="en-US" sz="1300" b="1" kern="0" spc="200" dirty="0">
                 <a:solidFill>
                   <a:srgbClr val="0A58CA"/>
                 </a:solidFill>
@@ -6890,7 +7151,7 @@
           <a:bodyPr wrap="square" lIns="0" tIns="0" rIns="0" bIns="0" rtlCol="0" anchor="ctr"/>
           <a:lstStyle/>
           <a:p>
-            <a:pPr indent="0" marL="0">
+            <a:pPr marL="0" indent="0">
               <a:buNone/>
             </a:pPr>
             <a:r>
@@ -6927,6 +7188,13 @@
           </a:solidFill>
           <a:ln/>
         </p:spPr>
+        <p:txBody>
+          <a:bodyPr/>
+          <a:lstStyle/>
+          <a:p>
+            <a:endParaRPr lang="es-PE"/>
+          </a:p>
+        </p:txBody>
       </p:sp>
       <p:sp>
         <p:nvSpPr>
@@ -6949,7 +7217,7 @@
           <a:bodyPr wrap="square" lIns="0" tIns="0" rIns="0" bIns="0" rtlCol="0" anchor="ctr"/>
           <a:lstStyle/>
           <a:p>
-            <a:pPr algn="ctr" indent="0" marL="0">
+            <a:pPr marL="0" indent="0" algn="ctr">
               <a:buNone/>
             </a:pPr>
             <a:r>
@@ -6988,7 +7256,7 @@
           <a:bodyPr wrap="square" lIns="0" tIns="0" rIns="0" bIns="0" rtlCol="0" anchor="ctr"/>
           <a:lstStyle/>
           <a:p>
-            <a:pPr indent="0" marL="0">
+            <a:pPr marL="0" indent="0">
               <a:buNone/>
             </a:pPr>
             <a:r>
@@ -7027,7 +7295,7 @@
           <a:bodyPr wrap="square" lIns="0" tIns="0" rIns="0" bIns="0" rtlCol="0" anchor="ctr"/>
           <a:lstStyle/>
           <a:p>
-            <a:pPr indent="0" marL="0">
+            <a:pPr marL="0" indent="0">
               <a:buNone/>
             </a:pPr>
             <a:r>
@@ -7064,6 +7332,13 @@
           </a:solidFill>
           <a:ln/>
         </p:spPr>
+        <p:txBody>
+          <a:bodyPr/>
+          <a:lstStyle/>
+          <a:p>
+            <a:endParaRPr lang="es-PE"/>
+          </a:p>
+        </p:txBody>
       </p:sp>
       <p:sp>
         <p:nvSpPr>
@@ -7086,7 +7361,7 @@
           <a:bodyPr wrap="square" lIns="0" tIns="0" rIns="0" bIns="0" rtlCol="0" anchor="ctr"/>
           <a:lstStyle/>
           <a:p>
-            <a:pPr algn="ctr" indent="0" marL="0">
+            <a:pPr marL="0" indent="0" algn="ctr">
               <a:buNone/>
             </a:pPr>
             <a:r>
@@ -7125,7 +7400,7 @@
           <a:bodyPr wrap="square" lIns="0" tIns="0" rIns="0" bIns="0" rtlCol="0" anchor="ctr"/>
           <a:lstStyle/>
           <a:p>
-            <a:pPr indent="0" marL="0">
+            <a:pPr marL="0" indent="0">
               <a:buNone/>
             </a:pPr>
             <a:r>
@@ -7164,7 +7439,7 @@
           <a:bodyPr wrap="square" lIns="0" tIns="0" rIns="0" bIns="0" rtlCol="0" anchor="ctr"/>
           <a:lstStyle/>
           <a:p>
-            <a:pPr indent="0" marL="0">
+            <a:pPr marL="0" indent="0">
               <a:buNone/>
             </a:pPr>
             <a:r>
@@ -7201,6 +7476,13 @@
           </a:solidFill>
           <a:ln/>
         </p:spPr>
+        <p:txBody>
+          <a:bodyPr/>
+          <a:lstStyle/>
+          <a:p>
+            <a:endParaRPr lang="es-PE"/>
+          </a:p>
+        </p:txBody>
       </p:sp>
       <p:sp>
         <p:nvSpPr>
@@ -7223,7 +7505,7 @@
           <a:bodyPr wrap="square" lIns="0" tIns="0" rIns="0" bIns="0" rtlCol="0" anchor="ctr"/>
           <a:lstStyle/>
           <a:p>
-            <a:pPr algn="ctr" indent="0" marL="0">
+            <a:pPr marL="0" indent="0" algn="ctr">
               <a:buNone/>
             </a:pPr>
             <a:r>
@@ -7262,7 +7544,7 @@
           <a:bodyPr wrap="square" lIns="0" tIns="0" rIns="0" bIns="0" rtlCol="0" anchor="ctr"/>
           <a:lstStyle/>
           <a:p>
-            <a:pPr indent="0" marL="0">
+            <a:pPr marL="0" indent="0">
               <a:buNone/>
             </a:pPr>
             <a:r>
@@ -7301,7 +7583,7 @@
           <a:bodyPr wrap="square" lIns="0" tIns="0" rIns="0" bIns="0" rtlCol="0" anchor="ctr"/>
           <a:lstStyle/>
           <a:p>
-            <a:pPr indent="0" marL="0">
+            <a:pPr marL="0" indent="0">
               <a:buNone/>
             </a:pPr>
             <a:r>
@@ -7338,6 +7620,13 @@
           </a:solidFill>
           <a:ln/>
         </p:spPr>
+        <p:txBody>
+          <a:bodyPr/>
+          <a:lstStyle/>
+          <a:p>
+            <a:endParaRPr lang="es-PE"/>
+          </a:p>
+        </p:txBody>
       </p:sp>
       <p:sp>
         <p:nvSpPr>
@@ -7360,7 +7649,7 @@
           <a:bodyPr wrap="square" lIns="0" tIns="0" rIns="0" bIns="0" rtlCol="0" anchor="ctr"/>
           <a:lstStyle/>
           <a:p>
-            <a:pPr algn="ctr" indent="0" marL="0">
+            <a:pPr marL="0" indent="0" algn="ctr">
               <a:buNone/>
             </a:pPr>
             <a:r>
@@ -7399,7 +7688,7 @@
           <a:bodyPr wrap="square" lIns="0" tIns="0" rIns="0" bIns="0" rtlCol="0" anchor="ctr"/>
           <a:lstStyle/>
           <a:p>
-            <a:pPr indent="0" marL="0">
+            <a:pPr marL="0" indent="0">
               <a:buNone/>
             </a:pPr>
             <a:r>
@@ -7438,7 +7727,7 @@
           <a:bodyPr wrap="square" lIns="0" tIns="0" rIns="0" bIns="0" rtlCol="0" anchor="ctr"/>
           <a:lstStyle/>
           <a:p>
-            <a:pPr indent="0" marL="0">
+            <a:pPr marL="0" indent="0">
               <a:buNone/>
             </a:pPr>
             <a:r>
@@ -7475,6 +7764,13 @@
           </a:solidFill>
           <a:ln/>
         </p:spPr>
+        <p:txBody>
+          <a:bodyPr/>
+          <a:lstStyle/>
+          <a:p>
+            <a:endParaRPr lang="es-PE"/>
+          </a:p>
+        </p:txBody>
       </p:sp>
       <p:sp>
         <p:nvSpPr>
@@ -7497,7 +7793,7 @@
           <a:bodyPr wrap="square" lIns="0" tIns="0" rIns="0" bIns="0" rtlCol="0" anchor="ctr"/>
           <a:lstStyle/>
           <a:p>
-            <a:pPr algn="ctr" indent="0" marL="0">
+            <a:pPr marL="0" indent="0" algn="ctr">
               <a:buNone/>
             </a:pPr>
             <a:r>
@@ -7536,7 +7832,7 @@
           <a:bodyPr wrap="square" lIns="0" tIns="0" rIns="0" bIns="0" rtlCol="0" anchor="ctr"/>
           <a:lstStyle/>
           <a:p>
-            <a:pPr indent="0" marL="0">
+            <a:pPr marL="0" indent="0">
               <a:buNone/>
             </a:pPr>
             <a:r>
@@ -7575,7 +7871,7 @@
           <a:bodyPr wrap="square" lIns="0" tIns="0" rIns="0" bIns="0" rtlCol="0" anchor="ctr"/>
           <a:lstStyle/>
           <a:p>
-            <a:pPr indent="0" marL="0">
+            <a:pPr marL="0" indent="0">
               <a:buNone/>
             </a:pPr>
             <a:r>
@@ -7612,6 +7908,13 @@
           </a:solidFill>
           <a:ln/>
         </p:spPr>
+        <p:txBody>
+          <a:bodyPr/>
+          <a:lstStyle/>
+          <a:p>
+            <a:endParaRPr lang="es-PE"/>
+          </a:p>
+        </p:txBody>
       </p:sp>
       <p:sp>
         <p:nvSpPr>
@@ -7634,7 +7937,7 @@
           <a:bodyPr wrap="square" lIns="0" tIns="0" rIns="0" bIns="0" rtlCol="0" anchor="ctr"/>
           <a:lstStyle/>
           <a:p>
-            <a:pPr algn="ctr" indent="0" marL="0">
+            <a:pPr marL="0" indent="0" algn="ctr">
               <a:buNone/>
             </a:pPr>
             <a:r>
@@ -7673,7 +7976,7 @@
           <a:bodyPr wrap="square" lIns="0" tIns="0" rIns="0" bIns="0" rtlCol="0" anchor="ctr"/>
           <a:lstStyle/>
           <a:p>
-            <a:pPr indent="0" marL="0">
+            <a:pPr marL="0" indent="0">
               <a:buNone/>
             </a:pPr>
             <a:r>
@@ -7712,7 +8015,7 @@
           <a:bodyPr wrap="square" lIns="0" tIns="0" rIns="0" bIns="0" rtlCol="0" anchor="ctr"/>
           <a:lstStyle/>
           <a:p>
-            <a:pPr indent="0" marL="0">
+            <a:pPr marL="0" indent="0">
               <a:buNone/>
             </a:pPr>
             <a:r>
@@ -7749,6 +8052,13 @@
           </a:solidFill>
           <a:ln/>
         </p:spPr>
+        <p:txBody>
+          <a:bodyPr/>
+          <a:lstStyle/>
+          <a:p>
+            <a:endParaRPr lang="es-PE"/>
+          </a:p>
+        </p:txBody>
       </p:sp>
       <p:sp>
         <p:nvSpPr>
@@ -7771,7 +8081,7 @@
           <a:bodyPr wrap="square" lIns="0" tIns="0" rIns="0" bIns="0" rtlCol="0" anchor="ctr"/>
           <a:lstStyle/>
           <a:p>
-            <a:pPr algn="ctr" indent="0" marL="0">
+            <a:pPr marL="0" indent="0" algn="ctr">
               <a:buNone/>
             </a:pPr>
             <a:r>
@@ -7810,7 +8120,7 @@
           <a:bodyPr wrap="square" lIns="0" tIns="0" rIns="0" bIns="0" rtlCol="0" anchor="ctr"/>
           <a:lstStyle/>
           <a:p>
-            <a:pPr indent="0" marL="0">
+            <a:pPr marL="0" indent="0">
               <a:buNone/>
             </a:pPr>
             <a:r>
@@ -7849,7 +8159,7 @@
           <a:bodyPr wrap="square" lIns="0" tIns="0" rIns="0" bIns="0" rtlCol="0" anchor="ctr"/>
           <a:lstStyle/>
           <a:p>
-            <a:pPr indent="0" marL="0">
+            <a:pPr marL="0" indent="0">
               <a:buNone/>
             </a:pPr>
             <a:r>
@@ -7886,6 +8196,13 @@
           </a:solidFill>
           <a:ln/>
         </p:spPr>
+        <p:txBody>
+          <a:bodyPr/>
+          <a:lstStyle/>
+          <a:p>
+            <a:endParaRPr lang="es-PE"/>
+          </a:p>
+        </p:txBody>
       </p:sp>
       <p:sp>
         <p:nvSpPr>
@@ -7908,7 +8225,7 @@
           <a:bodyPr wrap="square" lIns="0" tIns="0" rIns="0" bIns="0" rtlCol="0" anchor="ctr"/>
           <a:lstStyle/>
           <a:p>
-            <a:pPr algn="ctr" indent="0" marL="0">
+            <a:pPr marL="0" indent="0" algn="ctr">
               <a:buNone/>
             </a:pPr>
             <a:r>
@@ -7947,7 +8264,7 @@
           <a:bodyPr wrap="square" lIns="0" tIns="0" rIns="0" bIns="0" rtlCol="0" anchor="ctr"/>
           <a:lstStyle/>
           <a:p>
-            <a:pPr indent="0" marL="0">
+            <a:pPr marL="0" indent="0">
               <a:buNone/>
             </a:pPr>
             <a:r>
@@ -7986,7 +8303,7 @@
           <a:bodyPr wrap="square" lIns="0" tIns="0" rIns="0" bIns="0" rtlCol="0" anchor="ctr"/>
           <a:lstStyle/>
           <a:p>
-            <a:pPr indent="0" marL="0">
+            <a:pPr marL="0" indent="0">
               <a:buNone/>
             </a:pPr>
             <a:r>
@@ -8023,6 +8340,13 @@
           </a:solidFill>
           <a:ln/>
         </p:spPr>
+        <p:txBody>
+          <a:bodyPr/>
+          <a:lstStyle/>
+          <a:p>
+            <a:endParaRPr lang="es-PE"/>
+          </a:p>
+        </p:txBody>
       </p:sp>
       <p:sp>
         <p:nvSpPr>
@@ -8045,7 +8369,7 @@
           <a:bodyPr wrap="square" lIns="0" tIns="0" rIns="0" bIns="0" rtlCol="0" anchor="ctr"/>
           <a:lstStyle/>
           <a:p>
-            <a:pPr algn="ctr" indent="0" marL="0">
+            <a:pPr marL="0" indent="0" algn="ctr">
               <a:buNone/>
             </a:pPr>
             <a:r>
@@ -8084,7 +8408,7 @@
           <a:bodyPr wrap="square" lIns="0" tIns="0" rIns="0" bIns="0" rtlCol="0" anchor="ctr"/>
           <a:lstStyle/>
           <a:p>
-            <a:pPr indent="0" marL="0">
+            <a:pPr marL="0" indent="0">
               <a:buNone/>
             </a:pPr>
             <a:r>
@@ -8123,7 +8447,7 @@
           <a:bodyPr wrap="square" lIns="0" tIns="0" rIns="0" bIns="0" rtlCol="0" anchor="ctr"/>
           <a:lstStyle/>
           <a:p>
-            <a:pPr indent="0" marL="0">
+            <a:pPr marL="0" indent="0">
               <a:buNone/>
             </a:pPr>
             <a:r>
@@ -8162,7 +8486,7 @@
           <a:bodyPr wrap="square" lIns="0" tIns="0" rIns="0" bIns="0" rtlCol="0" anchor="ctr"/>
           <a:lstStyle/>
           <a:p>
-            <a:pPr algn="r" indent="0" marL="0">
+            <a:pPr marL="0" indent="0" algn="r">
               <a:buNone/>
             </a:pPr>
             <a:r>
@@ -8196,6 +8520,7 @@
         <a:solidFill>
           <a:srgbClr val="FFFFFF"/>
         </a:solidFill>
+        <a:effectLst/>
       </p:bgPr>
     </p:bg>
     <p:spTree>
@@ -8233,11 +8558,11 @@
           <a:bodyPr wrap="square" lIns="0" tIns="0" rIns="0" bIns="0" rtlCol="0" anchor="ctr"/>
           <a:lstStyle/>
           <a:p>
-            <a:pPr indent="0" marL="0">
-              <a:buNone/>
-            </a:pPr>
-            <a:r>
-              <a:rPr lang="en-US" sz="1300" b="1" spc="200" kern="0" dirty="0">
+            <a:pPr marL="0" indent="0">
+              <a:buNone/>
+            </a:pPr>
+            <a:r>
+              <a:rPr lang="en-US" sz="1300" b="1" kern="0" spc="200" dirty="0">
                 <a:solidFill>
                   <a:srgbClr val="0A58CA"/>
                 </a:solidFill>
@@ -8272,7 +8597,7 @@
           <a:bodyPr wrap="square" lIns="0" tIns="0" rIns="0" bIns="0" rtlCol="0" anchor="ctr"/>
           <a:lstStyle/>
           <a:p>
-            <a:pPr indent="0" marL="0">
+            <a:pPr marL="0" indent="0">
               <a:buNone/>
             </a:pPr>
             <a:r>
@@ -8316,17 +8641,24 @@
             <a:prstDash val="solid"/>
           </a:ln>
         </p:spPr>
+        <p:txBody>
+          <a:bodyPr/>
+          <a:lstStyle/>
+          <a:p>
+            <a:endParaRPr lang="es-PE"/>
+          </a:p>
+        </p:txBody>
       </p:sp>
       <p:pic>
         <p:nvPicPr>
-          <p:cNvPr id="5" name="Image 0" descr="/home/claude/deck/arquitectura_final.png">    </p:cNvPr>
+          <p:cNvPr id="5" name="Image 0" descr="/home/claude/deck/arquitectura_final.png"/>
           <p:cNvPicPr>
             <a:picLocks noChangeAspect="1"/>
           </p:cNvPicPr>
           <p:nvPr/>
         </p:nvPicPr>
         <p:blipFill>
-          <a:blip r:embed="rId1"/>
+          <a:blip r:embed="rId3"/>
           <a:stretch>
             <a:fillRect/>
           </a:stretch>
@@ -8362,7 +8694,7 @@
           <a:bodyPr wrap="square" lIns="0" tIns="0" rIns="0" bIns="0" rtlCol="0" anchor="ctr"/>
           <a:lstStyle/>
           <a:p>
-            <a:pPr algn="r" indent="0" marL="0">
+            <a:pPr marL="0" indent="0" algn="r">
               <a:buNone/>
             </a:pPr>
             <a:r>
@@ -8396,6 +8728,7 @@
         <a:solidFill>
           <a:srgbClr val="FFFFFF"/>
         </a:solidFill>
+        <a:effectLst/>
       </p:bgPr>
     </p:bg>
     <p:spTree>
@@ -8433,11 +8766,11 @@
           <a:bodyPr wrap="square" lIns="0" tIns="0" rIns="0" bIns="0" rtlCol="0" anchor="ctr"/>
           <a:lstStyle/>
           <a:p>
-            <a:pPr indent="0" marL="0">
-              <a:buNone/>
-            </a:pPr>
-            <a:r>
-              <a:rPr lang="en-US" sz="1300" b="1" spc="200" kern="0" dirty="0">
+            <a:pPr marL="0" indent="0">
+              <a:buNone/>
+            </a:pPr>
+            <a:r>
+              <a:rPr lang="en-US" sz="1300" b="1" kern="0" spc="200" dirty="0">
                 <a:solidFill>
                   <a:srgbClr val="0A58CA"/>
                 </a:solidFill>
@@ -8472,7 +8805,7 @@
           <a:bodyPr wrap="square" lIns="0" tIns="0" rIns="0" bIns="0" rtlCol="0" anchor="ctr"/>
           <a:lstStyle/>
           <a:p>
-            <a:pPr indent="0" marL="0">
+            <a:pPr marL="0" indent="0">
               <a:buNone/>
             </a:pPr>
             <a:r>
@@ -8516,6 +8849,13 @@
             <a:prstDash val="solid"/>
           </a:ln>
         </p:spPr>
+        <p:txBody>
+          <a:bodyPr/>
+          <a:lstStyle/>
+          <a:p>
+            <a:endParaRPr lang="es-PE"/>
+          </a:p>
+        </p:txBody>
       </p:sp>
       <p:sp>
         <p:nvSpPr>
@@ -8538,7 +8878,7 @@
           <a:bodyPr wrap="square" lIns="0" tIns="0" rIns="0" bIns="0" rtlCol="0" anchor="b"/>
           <a:lstStyle/>
           <a:p>
-            <a:pPr algn="ctr" indent="0" marL="0">
+            <a:pPr marL="0" indent="0" algn="ctr">
               <a:buNone/>
             </a:pPr>
             <a:r>
@@ -8577,7 +8917,7 @@
           <a:bodyPr wrap="square" lIns="0" tIns="0" rIns="0" bIns="0" rtlCol="0" anchor="t"/>
           <a:lstStyle/>
           <a:p>
-            <a:pPr algn="ctr" indent="0" marL="0">
+            <a:pPr marL="0" indent="0" algn="ctr">
               <a:buNone/>
             </a:pPr>
             <a:r>
@@ -8618,6 +8958,13 @@
             <a:tailEnd type="triangle"/>
           </a:ln>
         </p:spPr>
+        <p:txBody>
+          <a:bodyPr/>
+          <a:lstStyle/>
+          <a:p>
+            <a:endParaRPr lang="es-PE"/>
+          </a:p>
+        </p:txBody>
       </p:sp>
       <p:sp>
         <p:nvSpPr>
@@ -8645,6 +8992,13 @@
             <a:prstDash val="solid"/>
           </a:ln>
         </p:spPr>
+        <p:txBody>
+          <a:bodyPr/>
+          <a:lstStyle/>
+          <a:p>
+            <a:endParaRPr lang="es-PE"/>
+          </a:p>
+        </p:txBody>
       </p:sp>
       <p:sp>
         <p:nvSpPr>
@@ -8667,7 +9021,7 @@
           <a:bodyPr wrap="square" lIns="0" tIns="0" rIns="0" bIns="0" rtlCol="0" anchor="b"/>
           <a:lstStyle/>
           <a:p>
-            <a:pPr algn="ctr" indent="0" marL="0">
+            <a:pPr marL="0" indent="0" algn="ctr">
               <a:buNone/>
             </a:pPr>
             <a:r>
@@ -8706,7 +9060,7 @@
           <a:bodyPr wrap="square" lIns="0" tIns="0" rIns="0" bIns="0" rtlCol="0" anchor="t"/>
           <a:lstStyle/>
           <a:p>
-            <a:pPr algn="ctr" indent="0" marL="0">
+            <a:pPr marL="0" indent="0" algn="ctr">
               <a:buNone/>
             </a:pPr>
             <a:r>
@@ -8747,6 +9101,13 @@
             <a:tailEnd type="triangle"/>
           </a:ln>
         </p:spPr>
+        <p:txBody>
+          <a:bodyPr/>
+          <a:lstStyle/>
+          <a:p>
+            <a:endParaRPr lang="es-PE"/>
+          </a:p>
+        </p:txBody>
       </p:sp>
       <p:sp>
         <p:nvSpPr>
@@ -8771,6 +9132,13 @@
             <a:tailEnd type="triangle"/>
           </a:ln>
         </p:spPr>
+        <p:txBody>
+          <a:bodyPr/>
+          <a:lstStyle/>
+          <a:p>
+            <a:endParaRPr lang="es-PE"/>
+          </a:p>
+        </p:txBody>
       </p:sp>
       <p:sp>
         <p:nvSpPr>
@@ -8798,6 +9166,13 @@
             <a:prstDash val="solid"/>
           </a:ln>
         </p:spPr>
+        <p:txBody>
+          <a:bodyPr/>
+          <a:lstStyle/>
+          <a:p>
+            <a:endParaRPr lang="es-PE"/>
+          </a:p>
+        </p:txBody>
       </p:sp>
       <p:sp>
         <p:nvSpPr>
@@ -8820,7 +9195,7 @@
           <a:bodyPr wrap="square" lIns="0" tIns="0" rIns="0" bIns="0" rtlCol="0" anchor="b"/>
           <a:lstStyle/>
           <a:p>
-            <a:pPr algn="ctr" indent="0" marL="0">
+            <a:pPr marL="0" indent="0" algn="ctr">
               <a:buNone/>
             </a:pPr>
             <a:r>
@@ -8859,7 +9234,7 @@
           <a:bodyPr wrap="square" lIns="0" tIns="0" rIns="0" bIns="0" rtlCol="0" anchor="t"/>
           <a:lstStyle/>
           <a:p>
-            <a:pPr algn="ctr" indent="0" marL="0">
+            <a:pPr marL="0" indent="0" algn="ctr">
               <a:buNone/>
             </a:pPr>
             <a:r>
@@ -8903,6 +9278,13 @@
             <a:prstDash val="solid"/>
           </a:ln>
         </p:spPr>
+        <p:txBody>
+          <a:bodyPr/>
+          <a:lstStyle/>
+          <a:p>
+            <a:endParaRPr lang="es-PE"/>
+          </a:p>
+        </p:txBody>
       </p:sp>
       <p:sp>
         <p:nvSpPr>
@@ -8925,7 +9307,7 @@
           <a:bodyPr wrap="square" lIns="0" tIns="0" rIns="0" bIns="0" rtlCol="0" anchor="b"/>
           <a:lstStyle/>
           <a:p>
-            <a:pPr algn="ctr" indent="0" marL="0">
+            <a:pPr marL="0" indent="0" algn="ctr">
               <a:buNone/>
             </a:pPr>
             <a:r>
@@ -8964,7 +9346,7 @@
           <a:bodyPr wrap="square" lIns="0" tIns="0" rIns="0" bIns="0" rtlCol="0" anchor="t"/>
           <a:lstStyle/>
           <a:p>
-            <a:pPr algn="ctr" indent="0" marL="0">
+            <a:pPr marL="0" indent="0" algn="ctr">
               <a:buNone/>
             </a:pPr>
             <a:r>
@@ -9005,6 +9387,13 @@
             <a:tailEnd type="triangle"/>
           </a:ln>
         </p:spPr>
+        <p:txBody>
+          <a:bodyPr/>
+          <a:lstStyle/>
+          <a:p>
+            <a:endParaRPr lang="es-PE"/>
+          </a:p>
+        </p:txBody>
       </p:sp>
       <p:sp>
         <p:nvSpPr>
@@ -9027,7 +9416,7 @@
           <a:bodyPr wrap="square" lIns="0" tIns="0" rIns="0" bIns="0" rtlCol="0" anchor="ctr"/>
           <a:lstStyle/>
           <a:p>
-            <a:pPr algn="ctr" indent="0" marL="0">
+            <a:pPr marL="0" indent="0" algn="ctr">
               <a:buNone/>
             </a:pPr>
             <a:r>
@@ -9068,6 +9457,13 @@
             <a:tailEnd type="triangle"/>
           </a:ln>
         </p:spPr>
+        <p:txBody>
+          <a:bodyPr/>
+          <a:lstStyle/>
+          <a:p>
+            <a:endParaRPr lang="es-PE"/>
+          </a:p>
+        </p:txBody>
       </p:sp>
       <p:sp>
         <p:nvSpPr>
@@ -9092,6 +9488,13 @@
             <a:tailEnd type="triangle"/>
           </a:ln>
         </p:spPr>
+        <p:txBody>
+          <a:bodyPr/>
+          <a:lstStyle/>
+          <a:p>
+            <a:endParaRPr lang="es-PE"/>
+          </a:p>
+        </p:txBody>
       </p:sp>
       <p:sp>
         <p:nvSpPr>
@@ -9119,6 +9522,13 @@
             <a:prstDash val="solid"/>
           </a:ln>
         </p:spPr>
+        <p:txBody>
+          <a:bodyPr/>
+          <a:lstStyle/>
+          <a:p>
+            <a:endParaRPr lang="es-PE"/>
+          </a:p>
+        </p:txBody>
       </p:sp>
       <p:sp>
         <p:nvSpPr>
@@ -9141,7 +9551,7 @@
           <a:bodyPr wrap="square" lIns="0" tIns="0" rIns="0" bIns="0" rtlCol="0" anchor="b"/>
           <a:lstStyle/>
           <a:p>
-            <a:pPr algn="ctr" indent="0" marL="0">
+            <a:pPr marL="0" indent="0" algn="ctr">
               <a:buNone/>
             </a:pPr>
             <a:r>
@@ -9180,7 +9590,7 @@
           <a:bodyPr wrap="square" lIns="0" tIns="0" rIns="0" bIns="0" rtlCol="0" anchor="t"/>
           <a:lstStyle/>
           <a:p>
-            <a:pPr algn="ctr" indent="0" marL="0">
+            <a:pPr marL="0" indent="0" algn="ctr">
               <a:buNone/>
             </a:pPr>
             <a:r>
@@ -9224,6 +9634,13 @@
             <a:prstDash val="solid"/>
           </a:ln>
         </p:spPr>
+        <p:txBody>
+          <a:bodyPr/>
+          <a:lstStyle/>
+          <a:p>
+            <a:endParaRPr lang="es-PE"/>
+          </a:p>
+        </p:txBody>
       </p:sp>
       <p:sp>
         <p:nvSpPr>
@@ -9246,7 +9663,7 @@
           <a:bodyPr wrap="square" lIns="0" tIns="0" rIns="0" bIns="0" rtlCol="0" anchor="b"/>
           <a:lstStyle/>
           <a:p>
-            <a:pPr algn="ctr" indent="0" marL="0">
+            <a:pPr marL="0" indent="0" algn="ctr">
               <a:buNone/>
             </a:pPr>
             <a:r>
@@ -9285,7 +9702,7 @@
           <a:bodyPr wrap="square" lIns="0" tIns="0" rIns="0" bIns="0" rtlCol="0" anchor="t"/>
           <a:lstStyle/>
           <a:p>
-            <a:pPr algn="ctr" indent="0" marL="0">
+            <a:pPr marL="0" indent="0" algn="ctr">
               <a:buNone/>
             </a:pPr>
             <a:r>
@@ -9324,6 +9741,13 @@
           </a:solidFill>
           <a:ln/>
         </p:spPr>
+        <p:txBody>
+          <a:bodyPr/>
+          <a:lstStyle/>
+          <a:p>
+            <a:endParaRPr lang="es-PE"/>
+          </a:p>
+        </p:txBody>
       </p:sp>
       <p:sp>
         <p:nvSpPr>
@@ -9346,7 +9770,7 @@
           <a:bodyPr wrap="square" lIns="0" tIns="0" rIns="0" bIns="0" rtlCol="0" anchor="ctr"/>
           <a:lstStyle/>
           <a:p>
-            <a:pPr indent="0" marL="0">
+            <a:pPr marL="0" indent="0">
               <a:buNone/>
             </a:pPr>
             <a:r>
@@ -9390,6 +9814,13 @@
             <a:prstDash val="solid"/>
           </a:ln>
         </p:spPr>
+        <p:txBody>
+          <a:bodyPr/>
+          <a:lstStyle/>
+          <a:p>
+            <a:endParaRPr lang="es-PE"/>
+          </a:p>
+        </p:txBody>
       </p:sp>
       <p:sp>
         <p:nvSpPr>
@@ -9497,6 +9928,13 @@
           </a:solidFill>
           <a:ln/>
         </p:spPr>
+        <p:txBody>
+          <a:bodyPr/>
+          <a:lstStyle/>
+          <a:p>
+            <a:endParaRPr lang="es-PE"/>
+          </a:p>
+        </p:txBody>
       </p:sp>
       <p:sp>
         <p:nvSpPr>
@@ -9519,7 +9957,7 @@
           <a:bodyPr wrap="square" lIns="0" tIns="0" rIns="0" bIns="0" rtlCol="0" anchor="ctr"/>
           <a:lstStyle/>
           <a:p>
-            <a:pPr indent="0" marL="0">
+            <a:pPr marL="0" indent="0">
               <a:buNone/>
             </a:pPr>
             <a:r>
@@ -9563,6 +10001,13 @@
             <a:prstDash val="solid"/>
           </a:ln>
         </p:spPr>
+        <p:txBody>
+          <a:bodyPr/>
+          <a:lstStyle/>
+          <a:p>
+            <a:endParaRPr lang="es-PE"/>
+          </a:p>
+        </p:txBody>
       </p:sp>
       <p:sp>
         <p:nvSpPr>
@@ -9670,7 +10115,7 @@
           <a:bodyPr wrap="square" lIns="0" tIns="0" rIns="0" bIns="0" rtlCol="0" anchor="ctr"/>
           <a:lstStyle/>
           <a:p>
-            <a:pPr algn="r" indent="0" marL="0">
+            <a:pPr marL="0" indent="0" algn="r">
               <a:buNone/>
             </a:pPr>
             <a:r>
@@ -9704,6 +10149,7 @@
         <a:solidFill>
           <a:srgbClr val="FFFFFF"/>
         </a:solidFill>
+        <a:effectLst/>
       </p:bgPr>
     </p:bg>
     <p:spTree>
@@ -9741,11 +10187,11 @@
           <a:bodyPr wrap="square" lIns="0" tIns="0" rIns="0" bIns="0" rtlCol="0" anchor="ctr"/>
           <a:lstStyle/>
           <a:p>
-            <a:pPr indent="0" marL="0">
-              <a:buNone/>
-            </a:pPr>
-            <a:r>
-              <a:rPr lang="en-US" sz="1300" b="1" spc="200" kern="0" dirty="0">
+            <a:pPr marL="0" indent="0">
+              <a:buNone/>
+            </a:pPr>
+            <a:r>
+              <a:rPr lang="en-US" sz="1300" b="1" kern="0" spc="200" dirty="0">
                 <a:solidFill>
                   <a:srgbClr val="0A58CA"/>
                 </a:solidFill>
@@ -9780,7 +10226,7 @@
           <a:bodyPr wrap="square" lIns="0" tIns="0" rIns="0" bIns="0" rtlCol="0" anchor="ctr"/>
           <a:lstStyle/>
           <a:p>
-            <a:pPr indent="0" marL="0">
+            <a:pPr marL="0" indent="0">
               <a:buNone/>
             </a:pPr>
             <a:r>
@@ -9824,6 +10270,13 @@
             <a:prstDash val="solid"/>
           </a:ln>
         </p:spPr>
+        <p:txBody>
+          <a:bodyPr/>
+          <a:lstStyle/>
+          <a:p>
+            <a:endParaRPr lang="es-PE"/>
+          </a:p>
+        </p:txBody>
       </p:sp>
       <p:sp>
         <p:nvSpPr>
@@ -9846,7 +10299,7 @@
           <a:bodyPr wrap="square" lIns="0" tIns="0" rIns="0" bIns="0" rtlCol="0" anchor="b"/>
           <a:lstStyle/>
           <a:p>
-            <a:pPr algn="ctr" indent="0" marL="0">
+            <a:pPr marL="0" indent="0" algn="ctr">
               <a:buNone/>
             </a:pPr>
             <a:r>
@@ -9885,7 +10338,7 @@
           <a:bodyPr wrap="square" lIns="0" tIns="0" rIns="0" bIns="0" rtlCol="0" anchor="t"/>
           <a:lstStyle/>
           <a:p>
-            <a:pPr algn="ctr" indent="0" marL="0">
+            <a:pPr marL="0" indent="0" algn="ctr">
               <a:buNone/>
             </a:pPr>
             <a:r>
@@ -9926,6 +10379,13 @@
             <a:tailEnd type="triangle"/>
           </a:ln>
         </p:spPr>
+        <p:txBody>
+          <a:bodyPr/>
+          <a:lstStyle/>
+          <a:p>
+            <a:endParaRPr lang="es-PE"/>
+          </a:p>
+        </p:txBody>
       </p:sp>
       <p:sp>
         <p:nvSpPr>
@@ -9953,6 +10413,13 @@
             <a:prstDash val="solid"/>
           </a:ln>
         </p:spPr>
+        <p:txBody>
+          <a:bodyPr/>
+          <a:lstStyle/>
+          <a:p>
+            <a:endParaRPr lang="es-PE"/>
+          </a:p>
+        </p:txBody>
       </p:sp>
       <p:sp>
         <p:nvSpPr>
@@ -9975,7 +10442,7 @@
           <a:bodyPr wrap="square" lIns="0" tIns="0" rIns="0" bIns="0" rtlCol="0" anchor="b"/>
           <a:lstStyle/>
           <a:p>
-            <a:pPr algn="ctr" indent="0" marL="0">
+            <a:pPr marL="0" indent="0" algn="ctr">
               <a:buNone/>
             </a:pPr>
             <a:r>
@@ -10014,7 +10481,7 @@
           <a:bodyPr wrap="square" lIns="0" tIns="0" rIns="0" bIns="0" rtlCol="0" anchor="t"/>
           <a:lstStyle/>
           <a:p>
-            <a:pPr algn="ctr" indent="0" marL="0">
+            <a:pPr marL="0" indent="0" algn="ctr">
               <a:buNone/>
             </a:pPr>
             <a:r>
@@ -10055,6 +10522,13 @@
             <a:tailEnd type="triangle"/>
           </a:ln>
         </p:spPr>
+        <p:txBody>
+          <a:bodyPr/>
+          <a:lstStyle/>
+          <a:p>
+            <a:endParaRPr lang="es-PE"/>
+          </a:p>
+        </p:txBody>
       </p:sp>
       <p:sp>
         <p:nvSpPr>
@@ -10082,6 +10556,13 @@
             <a:prstDash val="solid"/>
           </a:ln>
         </p:spPr>
+        <p:txBody>
+          <a:bodyPr/>
+          <a:lstStyle/>
+          <a:p>
+            <a:endParaRPr lang="es-PE"/>
+          </a:p>
+        </p:txBody>
       </p:sp>
       <p:sp>
         <p:nvSpPr>
@@ -10104,7 +10585,7 @@
           <a:bodyPr wrap="square" lIns="0" tIns="0" rIns="0" bIns="0" rtlCol="0" anchor="b"/>
           <a:lstStyle/>
           <a:p>
-            <a:pPr algn="ctr" indent="0" marL="0">
+            <a:pPr marL="0" indent="0" algn="ctr">
               <a:buNone/>
             </a:pPr>
             <a:r>
@@ -10143,7 +10624,7 @@
           <a:bodyPr wrap="square" lIns="0" tIns="0" rIns="0" bIns="0" rtlCol="0" anchor="t"/>
           <a:lstStyle/>
           <a:p>
-            <a:pPr algn="ctr" indent="0" marL="0">
+            <a:pPr marL="0" indent="0" algn="ctr">
               <a:buNone/>
             </a:pPr>
             <a:r>
@@ -10184,6 +10665,13 @@
             <a:tailEnd type="triangle"/>
           </a:ln>
         </p:spPr>
+        <p:txBody>
+          <a:bodyPr/>
+          <a:lstStyle/>
+          <a:p>
+            <a:endParaRPr lang="es-PE"/>
+          </a:p>
+        </p:txBody>
       </p:sp>
       <p:sp>
         <p:nvSpPr>
@@ -10211,6 +10699,13 @@
             <a:prstDash val="solid"/>
           </a:ln>
         </p:spPr>
+        <p:txBody>
+          <a:bodyPr/>
+          <a:lstStyle/>
+          <a:p>
+            <a:endParaRPr lang="es-PE"/>
+          </a:p>
+        </p:txBody>
       </p:sp>
       <p:sp>
         <p:nvSpPr>
@@ -10233,7 +10728,7 @@
           <a:bodyPr wrap="square" lIns="0" tIns="0" rIns="0" bIns="0" rtlCol="0" anchor="b"/>
           <a:lstStyle/>
           <a:p>
-            <a:pPr algn="ctr" indent="0" marL="0">
+            <a:pPr marL="0" indent="0" algn="ctr">
               <a:buNone/>
             </a:pPr>
             <a:r>
@@ -10272,7 +10767,7 @@
           <a:bodyPr wrap="square" lIns="0" tIns="0" rIns="0" bIns="0" rtlCol="0" anchor="t"/>
           <a:lstStyle/>
           <a:p>
-            <a:pPr algn="ctr" indent="0" marL="0">
+            <a:pPr marL="0" indent="0" algn="ctr">
               <a:buNone/>
             </a:pPr>
             <a:r>
@@ -10311,7 +10806,7 @@
           <a:bodyPr wrap="square" lIns="0" tIns="0" rIns="0" bIns="0" rtlCol="0" anchor="ctr"/>
           <a:lstStyle/>
           <a:p>
-            <a:pPr algn="ctr" indent="0" marL="0">
+            <a:pPr marL="0" indent="0" algn="ctr">
               <a:buNone/>
             </a:pPr>
             <a:r>
@@ -10350,6 +10845,13 @@
           </a:solidFill>
           <a:ln/>
         </p:spPr>
+        <p:txBody>
+          <a:bodyPr/>
+          <a:lstStyle/>
+          <a:p>
+            <a:endParaRPr lang="es-PE"/>
+          </a:p>
+        </p:txBody>
       </p:sp>
       <p:sp>
         <p:nvSpPr>
@@ -10372,9 +10874,6 @@
           <a:bodyPr wrap="square" lIns="0" tIns="0" rIns="0" bIns="0" rtlCol="0" anchor="ctr"/>
           <a:lstStyle/>
           <a:p>
-            <a:pPr indent="0" marL="0">
-              <a:buNone/>
-            </a:pPr>
             <a:r>
               <a:rPr lang="en-US" sz="1300" b="1" dirty="0">
                 <a:solidFill>
@@ -10384,7 +10883,7 @@
                 <a:ea typeface="Calibri" pitchFamily="34" charset="-122"/>
                 <a:cs typeface="Calibri" pitchFamily="34" charset="-120"/>
               </a:rPr>
-              <a:t>Compatibilidad conservada</a:t>
+              <a:t>Por qué hexagonal</a:t>
             </a:r>
             <a:endParaRPr lang="en-US" sz="1300" dirty="0"/>
           </a:p>
@@ -10416,6 +10915,13 @@
             <a:prstDash val="solid"/>
           </a:ln>
         </p:spPr>
+        <p:txBody>
+          <a:bodyPr/>
+          <a:lstStyle/>
+          <a:p>
+            <a:endParaRPr lang="es-PE"/>
+          </a:p>
+        </p:txBody>
       </p:sp>
       <p:sp>
         <p:nvSpPr>
@@ -10454,7 +10960,29 @@
                 <a:ea typeface="Calibri" pitchFamily="34" charset="-122"/>
                 <a:cs typeface="Calibri" pitchFamily="34" charset="-120"/>
               </a:rPr>
-              <a:t>Mismas rutas /api/auth y /api/users.</a:t>
+              <a:t>El dominio no conoce ASP.NET Identity, EF Core </a:t>
+            </a:r>
+            <a:r>
+              <a:rPr lang="en-US" sz="1150" dirty="0" err="1">
+                <a:solidFill>
+                  <a:srgbClr val="1A2233"/>
+                </a:solidFill>
+                <a:latin typeface="Calibri" pitchFamily="34" charset="0"/>
+                <a:ea typeface="Calibri" pitchFamily="34" charset="-122"/>
+                <a:cs typeface="Calibri" pitchFamily="34" charset="-120"/>
+              </a:rPr>
+              <a:t>ni</a:t>
+            </a:r>
+            <a:r>
+              <a:rPr lang="en-US" sz="1150" dirty="0">
+                <a:solidFill>
+                  <a:srgbClr val="1A2233"/>
+                </a:solidFill>
+                <a:latin typeface="Calibri" pitchFamily="34" charset="0"/>
+                <a:ea typeface="Calibri" pitchFamily="34" charset="-122"/>
+                <a:cs typeface="Calibri" pitchFamily="34" charset="-120"/>
+              </a:rPr>
+              <a:t> JWT.</a:t>
             </a:r>
             <a:endParaRPr lang="en-US" sz="1150" dirty="0"/>
           </a:p>
@@ -10475,7 +11003,7 @@
                 <a:ea typeface="Calibri" pitchFamily="34" charset="-122"/>
                 <a:cs typeface="Calibri" pitchFamily="34" charset="-120"/>
               </a:rPr>
-              <a:t>Mismo puerto :8082 y mismo Dockerfile.</a:t>
+              <a:t>Los casos de uso dependen de puertos (interfaces), no de implementaciones.</a:t>
             </a:r>
             <a:endParaRPr lang="en-US" sz="1150" dirty="0"/>
           </a:p>
@@ -10496,7 +11024,7 @@
                 <a:ea typeface="Calibri" pitchFamily="34" charset="-122"/>
                 <a:cs typeface="Calibri" pitchFamily="34" charset="-120"/>
               </a:rPr>
-              <a:t>Mismos modelos JSON de entrada/salida.</a:t>
+              <a:t>Los adapters se pueden reemplazar sin tocar el núcleo.</a:t>
             </a:r>
             <a:endParaRPr lang="en-US" sz="1150" dirty="0"/>
           </a:p>
@@ -10523,6 +11051,13 @@
           </a:solidFill>
           <a:ln/>
         </p:spPr>
+        <p:txBody>
+          <a:bodyPr/>
+          <a:lstStyle/>
+          <a:p>
+            <a:endParaRPr lang="es-PE"/>
+          </a:p>
+        </p:txBody>
       </p:sp>
       <p:sp>
         <p:nvSpPr>
@@ -10545,7 +11080,7 @@
           <a:bodyPr wrap="square" lIns="0" tIns="0" rIns="0" bIns="0" rtlCol="0" anchor="ctr"/>
           <a:lstStyle/>
           <a:p>
-            <a:pPr indent="0" marL="0">
+            <a:pPr marL="0" indent="0">
               <a:buNone/>
             </a:pPr>
             <a:r>
@@ -10557,7 +11092,7 @@
                 <a:ea typeface="Calibri" pitchFamily="34" charset="-122"/>
                 <a:cs typeface="Calibri" pitchFamily="34" charset="-120"/>
               </a:rPr>
-              <a:t>Responsabilidades nuevas</a:t>
+              <a:t>Responsabilidades</a:t>
             </a:r>
             <a:endParaRPr lang="en-US" sz="1300" dirty="0"/>
           </a:p>
@@ -10589,6 +11124,13 @@
             <a:prstDash val="solid"/>
           </a:ln>
         </p:spPr>
+        <p:txBody>
+          <a:bodyPr/>
+          <a:lstStyle/>
+          <a:p>
+            <a:endParaRPr lang="es-PE"/>
+          </a:p>
+        </p:txBody>
       </p:sp>
       <p:sp>
         <p:nvSpPr>
@@ -10738,7 +11280,7 @@
           <a:bodyPr wrap="square" lIns="0" tIns="0" rIns="0" bIns="0" rtlCol="0" anchor="ctr"/>
           <a:lstStyle/>
           <a:p>
-            <a:pPr algn="r" indent="0" marL="0">
+            <a:pPr marL="0" indent="0" algn="r">
               <a:buNone/>
             </a:pPr>
             <a:r>
@@ -10772,6 +11314,7 @@
         <a:solidFill>
           <a:srgbClr val="FFFFFF"/>
         </a:solidFill>
+        <a:effectLst/>
       </p:bgPr>
     </p:bg>
     <p:spTree>
@@ -10809,11 +11352,11 @@
           <a:bodyPr wrap="square" lIns="0" tIns="0" rIns="0" bIns="0" rtlCol="0" anchor="ctr"/>
           <a:lstStyle/>
           <a:p>
-            <a:pPr indent="0" marL="0">
-              <a:buNone/>
-            </a:pPr>
-            <a:r>
-              <a:rPr lang="en-US" sz="1300" b="1" spc="200" kern="0" dirty="0">
+            <a:pPr marL="0" indent="0">
+              <a:buNone/>
+            </a:pPr>
+            <a:r>
+              <a:rPr lang="en-US" sz="1300" b="1" kern="0" spc="200" dirty="0">
                 <a:solidFill>
                   <a:srgbClr val="0A58CA"/>
                 </a:solidFill>
@@ -10848,7 +11391,7 @@
           <a:bodyPr wrap="square" lIns="0" tIns="0" rIns="0" bIns="0" rtlCol="0" anchor="ctr"/>
           <a:lstStyle/>
           <a:p>
-            <a:pPr indent="0" marL="0">
+            <a:pPr marL="0" indent="0">
               <a:buNone/>
             </a:pPr>
             <a:r>
@@ -10885,6 +11428,13 @@
           </a:solidFill>
           <a:ln/>
         </p:spPr>
+        <p:txBody>
+          <a:bodyPr/>
+          <a:lstStyle/>
+          <a:p>
+            <a:endParaRPr lang="es-PE"/>
+          </a:p>
+        </p:txBody>
       </p:sp>
       <p:sp>
         <p:nvSpPr>
@@ -10907,7 +11457,7 @@
           <a:bodyPr wrap="square" lIns="0" tIns="0" rIns="0" bIns="0" rtlCol="0" anchor="ctr"/>
           <a:lstStyle/>
           <a:p>
-            <a:pPr algn="ctr" indent="0" marL="0">
+            <a:pPr marL="0" indent="0" algn="ctr">
               <a:buNone/>
             </a:pPr>
             <a:r>
@@ -10951,6 +11501,13 @@
             <a:prstDash val="solid"/>
           </a:ln>
         </p:spPr>
+        <p:txBody>
+          <a:bodyPr/>
+          <a:lstStyle/>
+          <a:p>
+            <a:endParaRPr lang="es-PE"/>
+          </a:p>
+        </p:txBody>
       </p:sp>
       <p:sp>
         <p:nvSpPr>
@@ -10973,7 +11530,7 @@
           <a:bodyPr wrap="square" lIns="0" tIns="0" rIns="0" bIns="0" rtlCol="0" anchor="ctr"/>
           <a:lstStyle/>
           <a:p>
-            <a:pPr indent="0" marL="0">
+            <a:pPr marL="0" indent="0">
               <a:buNone/>
             </a:pPr>
             <a:r>
@@ -11012,7 +11569,7 @@
           <a:bodyPr wrap="square" lIns="0" tIns="0" rIns="0" bIns="0" rtlCol="0" anchor="ctr"/>
           <a:lstStyle/>
           <a:p>
-            <a:pPr indent="0" marL="0">
+            <a:pPr marL="0" indent="0">
               <a:buNone/>
             </a:pPr>
             <a:r>
@@ -11053,6 +11610,13 @@
             <a:tailEnd type="triangle"/>
           </a:ln>
         </p:spPr>
+        <p:txBody>
+          <a:bodyPr/>
+          <a:lstStyle/>
+          <a:p>
+            <a:endParaRPr lang="es-PE"/>
+          </a:p>
+        </p:txBody>
       </p:sp>
       <p:sp>
         <p:nvSpPr>
@@ -11073,6 +11637,13 @@
           </a:solidFill>
           <a:ln/>
         </p:spPr>
+        <p:txBody>
+          <a:bodyPr/>
+          <a:lstStyle/>
+          <a:p>
+            <a:endParaRPr lang="es-PE"/>
+          </a:p>
+        </p:txBody>
       </p:sp>
       <p:sp>
         <p:nvSpPr>
@@ -11095,7 +11666,7 @@
           <a:bodyPr wrap="square" lIns="0" tIns="0" rIns="0" bIns="0" rtlCol="0" anchor="ctr"/>
           <a:lstStyle/>
           <a:p>
-            <a:pPr algn="ctr" indent="0" marL="0">
+            <a:pPr marL="0" indent="0" algn="ctr">
               <a:buNone/>
             </a:pPr>
             <a:r>
@@ -11139,6 +11710,13 @@
             <a:prstDash val="solid"/>
           </a:ln>
         </p:spPr>
+        <p:txBody>
+          <a:bodyPr/>
+          <a:lstStyle/>
+          <a:p>
+            <a:endParaRPr lang="es-PE"/>
+          </a:p>
+        </p:txBody>
       </p:sp>
       <p:sp>
         <p:nvSpPr>
@@ -11161,7 +11739,7 @@
           <a:bodyPr wrap="square" lIns="0" tIns="0" rIns="0" bIns="0" rtlCol="0" anchor="ctr"/>
           <a:lstStyle/>
           <a:p>
-            <a:pPr indent="0" marL="0">
+            <a:pPr marL="0" indent="0">
               <a:buNone/>
             </a:pPr>
             <a:r>
@@ -11200,7 +11778,7 @@
           <a:bodyPr wrap="square" lIns="0" tIns="0" rIns="0" bIns="0" rtlCol="0" anchor="ctr"/>
           <a:lstStyle/>
           <a:p>
-            <a:pPr indent="0" marL="0">
+            <a:pPr marL="0" indent="0">
               <a:buNone/>
             </a:pPr>
             <a:r>
@@ -11241,6 +11819,13 @@
             <a:tailEnd type="triangle"/>
           </a:ln>
         </p:spPr>
+        <p:txBody>
+          <a:bodyPr/>
+          <a:lstStyle/>
+          <a:p>
+            <a:endParaRPr lang="es-PE"/>
+          </a:p>
+        </p:txBody>
       </p:sp>
       <p:sp>
         <p:nvSpPr>
@@ -11261,6 +11846,13 @@
           </a:solidFill>
           <a:ln/>
         </p:spPr>
+        <p:txBody>
+          <a:bodyPr/>
+          <a:lstStyle/>
+          <a:p>
+            <a:endParaRPr lang="es-PE"/>
+          </a:p>
+        </p:txBody>
       </p:sp>
       <p:sp>
         <p:nvSpPr>
@@ -11283,7 +11875,7 @@
           <a:bodyPr wrap="square" lIns="0" tIns="0" rIns="0" bIns="0" rtlCol="0" anchor="ctr"/>
           <a:lstStyle/>
           <a:p>
-            <a:pPr algn="ctr" indent="0" marL="0">
+            <a:pPr marL="0" indent="0" algn="ctr">
               <a:buNone/>
             </a:pPr>
             <a:r>
@@ -11327,6 +11919,13 @@
             <a:prstDash val="solid"/>
           </a:ln>
         </p:spPr>
+        <p:txBody>
+          <a:bodyPr/>
+          <a:lstStyle/>
+          <a:p>
+            <a:endParaRPr lang="es-PE"/>
+          </a:p>
+        </p:txBody>
       </p:sp>
       <p:sp>
         <p:nvSpPr>
@@ -11349,7 +11948,7 @@
           <a:bodyPr wrap="square" lIns="0" tIns="0" rIns="0" bIns="0" rtlCol="0" anchor="ctr"/>
           <a:lstStyle/>
           <a:p>
-            <a:pPr indent="0" marL="0">
+            <a:pPr marL="0" indent="0">
               <a:buNone/>
             </a:pPr>
             <a:r>
@@ -11388,7 +11987,7 @@
           <a:bodyPr wrap="square" lIns="0" tIns="0" rIns="0" bIns="0" rtlCol="0" anchor="ctr"/>
           <a:lstStyle/>
           <a:p>
-            <a:pPr indent="0" marL="0">
+            <a:pPr marL="0" indent="0">
               <a:buNone/>
             </a:pPr>
             <a:r>
@@ -11429,6 +12028,13 @@
             <a:tailEnd type="triangle"/>
           </a:ln>
         </p:spPr>
+        <p:txBody>
+          <a:bodyPr/>
+          <a:lstStyle/>
+          <a:p>
+            <a:endParaRPr lang="es-PE"/>
+          </a:p>
+        </p:txBody>
       </p:sp>
       <p:sp>
         <p:nvSpPr>
@@ -11449,6 +12055,13 @@
           </a:solidFill>
           <a:ln/>
         </p:spPr>
+        <p:txBody>
+          <a:bodyPr/>
+          <a:lstStyle/>
+          <a:p>
+            <a:endParaRPr lang="es-PE"/>
+          </a:p>
+        </p:txBody>
       </p:sp>
       <p:sp>
         <p:nvSpPr>
@@ -11471,7 +12084,7 @@
           <a:bodyPr wrap="square" lIns="0" tIns="0" rIns="0" bIns="0" rtlCol="0" anchor="ctr"/>
           <a:lstStyle/>
           <a:p>
-            <a:pPr algn="ctr" indent="0" marL="0">
+            <a:pPr marL="0" indent="0" algn="ctr">
               <a:buNone/>
             </a:pPr>
             <a:r>
@@ -11515,6 +12128,13 @@
             <a:prstDash val="solid"/>
           </a:ln>
         </p:spPr>
+        <p:txBody>
+          <a:bodyPr/>
+          <a:lstStyle/>
+          <a:p>
+            <a:endParaRPr lang="es-PE"/>
+          </a:p>
+        </p:txBody>
       </p:sp>
       <p:sp>
         <p:nvSpPr>
@@ -11537,7 +12157,7 @@
           <a:bodyPr wrap="square" lIns="0" tIns="0" rIns="0" bIns="0" rtlCol="0" anchor="ctr"/>
           <a:lstStyle/>
           <a:p>
-            <a:pPr indent="0" marL="0">
+            <a:pPr marL="0" indent="0">
               <a:buNone/>
             </a:pPr>
             <a:r>
@@ -11576,7 +12196,7 @@
           <a:bodyPr wrap="square" lIns="0" tIns="0" rIns="0" bIns="0" rtlCol="0" anchor="ctr"/>
           <a:lstStyle/>
           <a:p>
-            <a:pPr indent="0" marL="0">
+            <a:pPr marL="0" indent="0">
               <a:buNone/>
             </a:pPr>
             <a:r>
@@ -11617,6 +12237,13 @@
             <a:tailEnd type="triangle"/>
           </a:ln>
         </p:spPr>
+        <p:txBody>
+          <a:bodyPr/>
+          <a:lstStyle/>
+          <a:p>
+            <a:endParaRPr lang="es-PE"/>
+          </a:p>
+        </p:txBody>
       </p:sp>
       <p:sp>
         <p:nvSpPr>
@@ -11637,6 +12264,13 @@
           </a:solidFill>
           <a:ln/>
         </p:spPr>
+        <p:txBody>
+          <a:bodyPr/>
+          <a:lstStyle/>
+          <a:p>
+            <a:endParaRPr lang="es-PE"/>
+          </a:p>
+        </p:txBody>
       </p:sp>
       <p:sp>
         <p:nvSpPr>
@@ -11659,7 +12293,7 @@
           <a:bodyPr wrap="square" lIns="0" tIns="0" rIns="0" bIns="0" rtlCol="0" anchor="ctr"/>
           <a:lstStyle/>
           <a:p>
-            <a:pPr algn="ctr" indent="0" marL="0">
+            <a:pPr marL="0" indent="0" algn="ctr">
               <a:buNone/>
             </a:pPr>
             <a:r>
@@ -11703,6 +12337,13 @@
             <a:prstDash val="solid"/>
           </a:ln>
         </p:spPr>
+        <p:txBody>
+          <a:bodyPr/>
+          <a:lstStyle/>
+          <a:p>
+            <a:endParaRPr lang="es-PE"/>
+          </a:p>
+        </p:txBody>
       </p:sp>
       <p:sp>
         <p:nvSpPr>
@@ -11725,7 +12366,7 @@
           <a:bodyPr wrap="square" lIns="0" tIns="0" rIns="0" bIns="0" rtlCol="0" anchor="ctr"/>
           <a:lstStyle/>
           <a:p>
-            <a:pPr indent="0" marL="0">
+            <a:pPr marL="0" indent="0">
               <a:buNone/>
             </a:pPr>
             <a:r>
@@ -11764,7 +12405,7 @@
           <a:bodyPr wrap="square" lIns="0" tIns="0" rIns="0" bIns="0" rtlCol="0" anchor="ctr"/>
           <a:lstStyle/>
           <a:p>
-            <a:pPr indent="0" marL="0">
+            <a:pPr marL="0" indent="0">
               <a:buNone/>
             </a:pPr>
             <a:r>
@@ -11805,6 +12446,13 @@
             <a:tailEnd type="triangle"/>
           </a:ln>
         </p:spPr>
+        <p:txBody>
+          <a:bodyPr/>
+          <a:lstStyle/>
+          <a:p>
+            <a:endParaRPr lang="es-PE"/>
+          </a:p>
+        </p:txBody>
       </p:sp>
       <p:sp>
         <p:nvSpPr>
@@ -11825,6 +12473,13 @@
           </a:solidFill>
           <a:ln/>
         </p:spPr>
+        <p:txBody>
+          <a:bodyPr/>
+          <a:lstStyle/>
+          <a:p>
+            <a:endParaRPr lang="es-PE"/>
+          </a:p>
+        </p:txBody>
       </p:sp>
       <p:sp>
         <p:nvSpPr>
@@ -11847,7 +12502,7 @@
           <a:bodyPr wrap="square" lIns="0" tIns="0" rIns="0" bIns="0" rtlCol="0" anchor="ctr"/>
           <a:lstStyle/>
           <a:p>
-            <a:pPr algn="ctr" indent="0" marL="0">
+            <a:pPr marL="0" indent="0" algn="ctr">
               <a:buNone/>
             </a:pPr>
             <a:r>
@@ -11891,6 +12546,13 @@
             <a:prstDash val="solid"/>
           </a:ln>
         </p:spPr>
+        <p:txBody>
+          <a:bodyPr/>
+          <a:lstStyle/>
+          <a:p>
+            <a:endParaRPr lang="es-PE"/>
+          </a:p>
+        </p:txBody>
       </p:sp>
       <p:sp>
         <p:nvSpPr>
@@ -11913,7 +12575,7 @@
           <a:bodyPr wrap="square" lIns="0" tIns="0" rIns="0" bIns="0" rtlCol="0" anchor="ctr"/>
           <a:lstStyle/>
           <a:p>
-            <a:pPr indent="0" marL="0">
+            <a:pPr marL="0" indent="0">
               <a:buNone/>
             </a:pPr>
             <a:r>
@@ -11952,7 +12614,7 @@
           <a:bodyPr wrap="square" lIns="0" tIns="0" rIns="0" bIns="0" rtlCol="0" anchor="ctr"/>
           <a:lstStyle/>
           <a:p>
-            <a:pPr indent="0" marL="0">
+            <a:pPr marL="0" indent="0">
               <a:buNone/>
             </a:pPr>
             <a:r>
@@ -11991,7 +12653,7 @@
           <a:bodyPr wrap="square" lIns="0" tIns="0" rIns="0" bIns="0" rtlCol="0" anchor="ctr"/>
           <a:lstStyle/>
           <a:p>
-            <a:pPr indent="0" marL="0">
+            <a:pPr marL="0" indent="0">
               <a:buNone/>
             </a:pPr>
             <a:r>
@@ -12030,7 +12692,7 @@
           <a:bodyPr wrap="square" lIns="0" tIns="0" rIns="0" bIns="0" rtlCol="0" anchor="ctr"/>
           <a:lstStyle/>
           <a:p>
-            <a:pPr algn="r" indent="0" marL="0">
+            <a:pPr marL="0" indent="0" algn="r">
               <a:buNone/>
             </a:pPr>
             <a:r>
@@ -12064,6 +12726,7 @@
         <a:solidFill>
           <a:srgbClr val="FFFFFF"/>
         </a:solidFill>
+        <a:effectLst/>
       </p:bgPr>
     </p:bg>
     <p:spTree>
@@ -12101,11 +12764,11 @@
           <a:bodyPr wrap="square" lIns="0" tIns="0" rIns="0" bIns="0" rtlCol="0" anchor="ctr"/>
           <a:lstStyle/>
           <a:p>
-            <a:pPr indent="0" marL="0">
-              <a:buNone/>
-            </a:pPr>
-            <a:r>
-              <a:rPr lang="en-US" sz="1300" b="1" spc="200" kern="0" dirty="0">
+            <a:pPr marL="0" indent="0">
+              <a:buNone/>
+            </a:pPr>
+            <a:r>
+              <a:rPr lang="en-US" sz="1300" b="1" kern="0" spc="200" dirty="0">
                 <a:solidFill>
                   <a:srgbClr val="0A58CA"/>
                 </a:solidFill>
@@ -12140,7 +12803,7 @@
           <a:bodyPr wrap="square" lIns="0" tIns="0" rIns="0" bIns="0" rtlCol="0" anchor="ctr"/>
           <a:lstStyle/>
           <a:p>
-            <a:pPr indent="0" marL="0">
+            <a:pPr marL="0" indent="0">
               <a:buNone/>
             </a:pPr>
             <a:r>
@@ -12179,6 +12842,13 @@
           </a:solidFill>
           <a:ln/>
         </p:spPr>
+        <p:txBody>
+          <a:bodyPr/>
+          <a:lstStyle/>
+          <a:p>
+            <a:endParaRPr lang="es-PE"/>
+          </a:p>
+        </p:txBody>
       </p:sp>
       <p:sp>
         <p:nvSpPr>
@@ -12201,7 +12871,7 @@
           <a:bodyPr wrap="square" lIns="0" tIns="0" rIns="0" bIns="0" rtlCol="0" anchor="ctr"/>
           <a:lstStyle/>
           <a:p>
-            <a:pPr indent="0" marL="0">
+            <a:pPr marL="0" indent="0">
               <a:buNone/>
             </a:pPr>
             <a:r>
@@ -12245,6 +12915,13 @@
             <a:prstDash val="solid"/>
           </a:ln>
         </p:spPr>
+        <p:txBody>
+          <a:bodyPr/>
+          <a:lstStyle/>
+          <a:p>
+            <a:endParaRPr lang="es-PE"/>
+          </a:p>
+        </p:txBody>
       </p:sp>
       <p:sp>
         <p:nvSpPr>
@@ -12352,6 +13029,13 @@
           </a:solidFill>
           <a:ln/>
         </p:spPr>
+        <p:txBody>
+          <a:bodyPr/>
+          <a:lstStyle/>
+          <a:p>
+            <a:endParaRPr lang="es-PE"/>
+          </a:p>
+        </p:txBody>
       </p:sp>
       <p:sp>
         <p:nvSpPr>
@@ -12374,7 +13058,7 @@
           <a:bodyPr wrap="square" lIns="0" tIns="0" rIns="0" bIns="0" rtlCol="0" anchor="ctr"/>
           <a:lstStyle/>
           <a:p>
-            <a:pPr indent="0" marL="0">
+            <a:pPr marL="0" indent="0">
               <a:buNone/>
             </a:pPr>
             <a:r>
@@ -12418,6 +13102,13 @@
             <a:prstDash val="solid"/>
           </a:ln>
         </p:spPr>
+        <p:txBody>
+          <a:bodyPr/>
+          <a:lstStyle/>
+          <a:p>
+            <a:endParaRPr lang="es-PE"/>
+          </a:p>
+        </p:txBody>
       </p:sp>
       <p:sp>
         <p:nvSpPr>
@@ -12525,6 +13216,13 @@
           </a:solidFill>
           <a:ln/>
         </p:spPr>
+        <p:txBody>
+          <a:bodyPr/>
+          <a:lstStyle/>
+          <a:p>
+            <a:endParaRPr lang="es-PE"/>
+          </a:p>
+        </p:txBody>
       </p:sp>
       <p:sp>
         <p:nvSpPr>
@@ -12547,7 +13245,7 @@
           <a:bodyPr wrap="square" lIns="0" tIns="0" rIns="0" bIns="0" rtlCol="0" anchor="ctr"/>
           <a:lstStyle/>
           <a:p>
-            <a:pPr indent="0" marL="0">
+            <a:pPr marL="0" indent="0">
               <a:buNone/>
             </a:pPr>
             <a:r>
@@ -12591,6 +13289,13 @@
             <a:prstDash val="solid"/>
           </a:ln>
         </p:spPr>
+        <p:txBody>
+          <a:bodyPr/>
+          <a:lstStyle/>
+          <a:p>
+            <a:endParaRPr lang="es-PE"/>
+          </a:p>
+        </p:txBody>
       </p:sp>
       <p:sp>
         <p:nvSpPr>
@@ -12611,6 +13316,13 @@
           </a:solidFill>
           <a:ln/>
         </p:spPr>
+        <p:txBody>
+          <a:bodyPr/>
+          <a:lstStyle/>
+          <a:p>
+            <a:endParaRPr lang="es-PE"/>
+          </a:p>
+        </p:txBody>
       </p:sp>
       <p:sp>
         <p:nvSpPr>
@@ -12633,7 +13345,7 @@
           <a:bodyPr wrap="square" lIns="0" tIns="0" rIns="0" bIns="0" rtlCol="0" anchor="ctr"/>
           <a:lstStyle/>
           <a:p>
-            <a:pPr algn="ctr" indent="0" marL="0">
+            <a:pPr marL="0" indent="0" algn="ctr">
               <a:buNone/>
             </a:pPr>
             <a:r>
@@ -12672,7 +13384,7 @@
           <a:bodyPr wrap="square" lIns="0" tIns="0" rIns="0" bIns="0" rtlCol="0" anchor="ctr"/>
           <a:lstStyle/>
           <a:p>
-            <a:pPr indent="0" marL="0">
+            <a:pPr marL="0" indent="0">
               <a:buNone/>
             </a:pPr>
             <a:r>
@@ -12709,6 +13421,13 @@
           </a:solidFill>
           <a:ln/>
         </p:spPr>
+        <p:txBody>
+          <a:bodyPr/>
+          <a:lstStyle/>
+          <a:p>
+            <a:endParaRPr lang="es-PE"/>
+          </a:p>
+        </p:txBody>
       </p:sp>
       <p:sp>
         <p:nvSpPr>
@@ -12731,7 +13450,7 @@
           <a:bodyPr wrap="square" lIns="0" tIns="0" rIns="0" bIns="0" rtlCol="0" anchor="ctr"/>
           <a:lstStyle/>
           <a:p>
-            <a:pPr algn="ctr" indent="0" marL="0">
+            <a:pPr marL="0" indent="0" algn="ctr">
               <a:buNone/>
             </a:pPr>
             <a:r>
@@ -12770,7 +13489,7 @@
           <a:bodyPr wrap="square" lIns="0" tIns="0" rIns="0" bIns="0" rtlCol="0" anchor="ctr"/>
           <a:lstStyle/>
           <a:p>
-            <a:pPr indent="0" marL="0">
+            <a:pPr marL="0" indent="0">
               <a:buNone/>
             </a:pPr>
             <a:r>
@@ -12807,6 +13526,13 @@
           </a:solidFill>
           <a:ln/>
         </p:spPr>
+        <p:txBody>
+          <a:bodyPr/>
+          <a:lstStyle/>
+          <a:p>
+            <a:endParaRPr lang="es-PE"/>
+          </a:p>
+        </p:txBody>
       </p:sp>
       <p:sp>
         <p:nvSpPr>
@@ -12829,7 +13555,7 @@
           <a:bodyPr wrap="square" lIns="0" tIns="0" rIns="0" bIns="0" rtlCol="0" anchor="ctr"/>
           <a:lstStyle/>
           <a:p>
-            <a:pPr algn="ctr" indent="0" marL="0">
+            <a:pPr marL="0" indent="0" algn="ctr">
               <a:buNone/>
             </a:pPr>
             <a:r>
@@ -12868,7 +13594,7 @@
           <a:bodyPr wrap="square" lIns="0" tIns="0" rIns="0" bIns="0" rtlCol="0" anchor="ctr"/>
           <a:lstStyle/>
           <a:p>
-            <a:pPr indent="0" marL="0">
+            <a:pPr marL="0" indent="0">
               <a:buNone/>
             </a:pPr>
             <a:r>
@@ -12907,7 +13633,7 @@
           <a:bodyPr wrap="square" lIns="0" tIns="0" rIns="0" bIns="0" rtlCol="0" anchor="ctr"/>
           <a:lstStyle/>
           <a:p>
-            <a:pPr algn="r" indent="0" marL="0">
+            <a:pPr marL="0" indent="0" algn="r">
               <a:buNone/>
             </a:pPr>
             <a:r>
@@ -12941,6 +13667,7 @@
         <a:solidFill>
           <a:srgbClr val="FFFFFF"/>
         </a:solidFill>
+        <a:effectLst/>
       </p:bgPr>
     </p:bg>
     <p:spTree>
@@ -12978,11 +13705,11 @@
           <a:bodyPr wrap="square" lIns="0" tIns="0" rIns="0" bIns="0" rtlCol="0" anchor="ctr"/>
           <a:lstStyle/>
           <a:p>
-            <a:pPr indent="0" marL="0">
-              <a:buNone/>
-            </a:pPr>
-            <a:r>
-              <a:rPr lang="en-US" sz="1300" b="1" spc="200" kern="0" dirty="0">
+            <a:pPr marL="0" indent="0">
+              <a:buNone/>
+            </a:pPr>
+            <a:r>
+              <a:rPr lang="en-US" sz="1300" b="1" kern="0" spc="200" dirty="0">
                 <a:solidFill>
                   <a:srgbClr val="0A58CA"/>
                 </a:solidFill>
@@ -13017,7 +13744,7 @@
           <a:bodyPr wrap="square" lIns="0" tIns="0" rIns="0" bIns="0" rtlCol="0" anchor="ctr"/>
           <a:lstStyle/>
           <a:p>
-            <a:pPr indent="0" marL="0">
+            <a:pPr marL="0" indent="0">
               <a:buNone/>
             </a:pPr>
             <a:r>
@@ -13061,6 +13788,13 @@
             <a:prstDash val="solid"/>
           </a:ln>
         </p:spPr>
+        <p:txBody>
+          <a:bodyPr/>
+          <a:lstStyle/>
+          <a:p>
+            <a:endParaRPr lang="es-PE"/>
+          </a:p>
+        </p:txBody>
       </p:sp>
       <p:sp>
         <p:nvSpPr>
@@ -13083,7 +13817,7 @@
           <a:bodyPr wrap="square" lIns="0" tIns="0" rIns="0" bIns="0" rtlCol="0" anchor="ctr"/>
           <a:lstStyle/>
           <a:p>
-            <a:pPr algn="ctr" indent="0" marL="0">
+            <a:pPr marL="0" indent="0" algn="ctr">
               <a:buNone/>
             </a:pPr>
             <a:r>
@@ -13124,6 +13858,13 @@
             <a:tailEnd type="triangle"/>
           </a:ln>
         </p:spPr>
+        <p:txBody>
+          <a:bodyPr/>
+          <a:lstStyle/>
+          <a:p>
+            <a:endParaRPr lang="es-PE"/>
+          </a:p>
+        </p:txBody>
       </p:sp>
       <p:sp>
         <p:nvSpPr>
@@ -13151,6 +13892,13 @@
             <a:prstDash val="solid"/>
           </a:ln>
         </p:spPr>
+        <p:txBody>
+          <a:bodyPr/>
+          <a:lstStyle/>
+          <a:p>
+            <a:endParaRPr lang="es-PE"/>
+          </a:p>
+        </p:txBody>
       </p:sp>
       <p:sp>
         <p:nvSpPr>
@@ -13173,7 +13921,7 @@
           <a:bodyPr wrap="square" lIns="0" tIns="0" rIns="0" bIns="0" rtlCol="0" anchor="ctr"/>
           <a:lstStyle/>
           <a:p>
-            <a:pPr algn="ctr" indent="0" marL="0">
+            <a:pPr marL="0" indent="0" algn="ctr">
               <a:buNone/>
             </a:pPr>
             <a:r>
@@ -13214,6 +13962,13 @@
             <a:tailEnd type="triangle"/>
           </a:ln>
         </p:spPr>
+        <p:txBody>
+          <a:bodyPr/>
+          <a:lstStyle/>
+          <a:p>
+            <a:endParaRPr lang="es-PE"/>
+          </a:p>
+        </p:txBody>
       </p:sp>
       <p:sp>
         <p:nvSpPr>
@@ -13241,6 +13996,13 @@
             <a:prstDash val="solid"/>
           </a:ln>
         </p:spPr>
+        <p:txBody>
+          <a:bodyPr/>
+          <a:lstStyle/>
+          <a:p>
+            <a:endParaRPr lang="es-PE"/>
+          </a:p>
+        </p:txBody>
       </p:sp>
       <p:sp>
         <p:nvSpPr>
@@ -13263,7 +14025,7 @@
           <a:bodyPr wrap="square" lIns="0" tIns="0" rIns="0" bIns="0" rtlCol="0" anchor="ctr"/>
           <a:lstStyle/>
           <a:p>
-            <a:pPr algn="ctr" indent="0" marL="0">
+            <a:pPr marL="0" indent="0" algn="ctr">
               <a:buNone/>
             </a:pPr>
             <a:r>
@@ -13304,6 +14066,13 @@
             <a:tailEnd type="triangle"/>
           </a:ln>
         </p:spPr>
+        <p:txBody>
+          <a:bodyPr/>
+          <a:lstStyle/>
+          <a:p>
+            <a:endParaRPr lang="es-PE"/>
+          </a:p>
+        </p:txBody>
       </p:sp>
       <p:sp>
         <p:nvSpPr>
@@ -13331,6 +14100,13 @@
             <a:prstDash val="solid"/>
           </a:ln>
         </p:spPr>
+        <p:txBody>
+          <a:bodyPr/>
+          <a:lstStyle/>
+          <a:p>
+            <a:endParaRPr lang="es-PE"/>
+          </a:p>
+        </p:txBody>
       </p:sp>
       <p:sp>
         <p:nvSpPr>
@@ -13353,7 +14129,7 @@
           <a:bodyPr wrap="square" lIns="0" tIns="0" rIns="0" bIns="0" rtlCol="0" anchor="ctr"/>
           <a:lstStyle/>
           <a:p>
-            <a:pPr algn="ctr" indent="0" marL="0">
+            <a:pPr marL="0" indent="0" algn="ctr">
               <a:buNone/>
             </a:pPr>
             <a:r>
@@ -13394,6 +14170,13 @@
             <a:tailEnd type="triangle"/>
           </a:ln>
         </p:spPr>
+        <p:txBody>
+          <a:bodyPr/>
+          <a:lstStyle/>
+          <a:p>
+            <a:endParaRPr lang="es-PE"/>
+          </a:p>
+        </p:txBody>
       </p:sp>
       <p:sp>
         <p:nvSpPr>
@@ -13421,6 +14204,13 @@
             <a:prstDash val="solid"/>
           </a:ln>
         </p:spPr>
+        <p:txBody>
+          <a:bodyPr/>
+          <a:lstStyle/>
+          <a:p>
+            <a:endParaRPr lang="es-PE"/>
+          </a:p>
+        </p:txBody>
       </p:sp>
       <p:sp>
         <p:nvSpPr>
@@ -13443,7 +14233,7 @@
           <a:bodyPr wrap="square" lIns="0" tIns="0" rIns="0" bIns="0" rtlCol="0" anchor="ctr"/>
           <a:lstStyle/>
           <a:p>
-            <a:pPr algn="ctr" indent="0" marL="0">
+            <a:pPr marL="0" indent="0" algn="ctr">
               <a:buNone/>
             </a:pPr>
             <a:r>
@@ -13484,6 +14274,13 @@
             <a:tailEnd type="triangle"/>
           </a:ln>
         </p:spPr>
+        <p:txBody>
+          <a:bodyPr/>
+          <a:lstStyle/>
+          <a:p>
+            <a:endParaRPr lang="es-PE"/>
+          </a:p>
+        </p:txBody>
       </p:sp>
       <p:sp>
         <p:nvSpPr>
@@ -13511,6 +14308,13 @@
             <a:prstDash val="solid"/>
           </a:ln>
         </p:spPr>
+        <p:txBody>
+          <a:bodyPr/>
+          <a:lstStyle/>
+          <a:p>
+            <a:endParaRPr lang="es-PE"/>
+          </a:p>
+        </p:txBody>
       </p:sp>
       <p:sp>
         <p:nvSpPr>
@@ -13533,7 +14337,7 @@
           <a:bodyPr wrap="square" lIns="0" tIns="0" rIns="0" bIns="0" rtlCol="0" anchor="ctr"/>
           <a:lstStyle/>
           <a:p>
-            <a:pPr algn="ctr" indent="0" marL="0">
+            <a:pPr marL="0" indent="0" algn="ctr">
               <a:buNone/>
             </a:pPr>
             <a:r>
@@ -13572,6 +14376,13 @@
           </a:solidFill>
           <a:ln/>
         </p:spPr>
+        <p:txBody>
+          <a:bodyPr/>
+          <a:lstStyle/>
+          <a:p>
+            <a:endParaRPr lang="es-PE"/>
+          </a:p>
+        </p:txBody>
       </p:sp>
       <p:sp>
         <p:nvSpPr>
@@ -13594,7 +14405,7 @@
           <a:bodyPr wrap="square" lIns="0" tIns="0" rIns="0" bIns="0" rtlCol="0" anchor="ctr"/>
           <a:lstStyle/>
           <a:p>
-            <a:pPr indent="0" marL="0">
+            <a:pPr marL="0" indent="0">
               <a:buNone/>
             </a:pPr>
             <a:r>
@@ -13638,6 +14449,13 @@
             <a:prstDash val="solid"/>
           </a:ln>
         </p:spPr>
+        <p:txBody>
+          <a:bodyPr/>
+          <a:lstStyle/>
+          <a:p>
+            <a:endParaRPr lang="es-PE"/>
+          </a:p>
+        </p:txBody>
       </p:sp>
       <p:sp>
         <p:nvSpPr>
@@ -13665,6 +14483,13 @@
             <a:prstDash val="solid"/>
           </a:ln>
         </p:spPr>
+        <p:txBody>
+          <a:bodyPr/>
+          <a:lstStyle/>
+          <a:p>
+            <a:endParaRPr lang="es-PE"/>
+          </a:p>
+        </p:txBody>
       </p:sp>
       <p:sp>
         <p:nvSpPr>
@@ -13687,7 +14512,7 @@
           <a:bodyPr wrap="square" lIns="0" tIns="0" rIns="0" bIns="0" rtlCol="0" anchor="b"/>
           <a:lstStyle/>
           <a:p>
-            <a:pPr algn="ctr" indent="0" marL="0">
+            <a:pPr marL="0" indent="0" algn="ctr">
               <a:buNone/>
             </a:pPr>
             <a:r>
@@ -13726,7 +14551,7 @@
           <a:bodyPr wrap="square" lIns="0" tIns="0" rIns="0" bIns="0" rtlCol="0" anchor="t"/>
           <a:lstStyle/>
           <a:p>
-            <a:pPr algn="ctr" indent="0" marL="0">
+            <a:pPr marL="0" indent="0" algn="ctr">
               <a:buNone/>
             </a:pPr>
             <a:r>
@@ -13767,6 +14592,13 @@
             <a:tailEnd type="triangle"/>
           </a:ln>
         </p:spPr>
+        <p:txBody>
+          <a:bodyPr/>
+          <a:lstStyle/>
+          <a:p>
+            <a:endParaRPr lang="es-PE"/>
+          </a:p>
+        </p:txBody>
       </p:sp>
       <p:sp>
         <p:nvSpPr>
@@ -13791,6 +14623,13 @@
             <a:tailEnd type="triangle"/>
           </a:ln>
         </p:spPr>
+        <p:txBody>
+          <a:bodyPr/>
+          <a:lstStyle/>
+          <a:p>
+            <a:endParaRPr lang="es-PE"/>
+          </a:p>
+        </p:txBody>
       </p:sp>
       <p:sp>
         <p:nvSpPr>
@@ -13818,6 +14657,13 @@
             <a:prstDash val="solid"/>
           </a:ln>
         </p:spPr>
+        <p:txBody>
+          <a:bodyPr/>
+          <a:lstStyle/>
+          <a:p>
+            <a:endParaRPr lang="es-PE"/>
+          </a:p>
+        </p:txBody>
       </p:sp>
       <p:sp>
         <p:nvSpPr>
@@ -13840,7 +14686,7 @@
           <a:bodyPr wrap="square" lIns="0" tIns="0" rIns="0" bIns="0" rtlCol="0" anchor="ctr"/>
           <a:lstStyle/>
           <a:p>
-            <a:pPr algn="ctr" indent="0" marL="0">
+            <a:pPr marL="0" indent="0" algn="ctr">
               <a:buNone/>
             </a:pPr>
             <a:r>
@@ -13884,6 +14730,13 @@
             <a:prstDash val="solid"/>
           </a:ln>
         </p:spPr>
+        <p:txBody>
+          <a:bodyPr/>
+          <a:lstStyle/>
+          <a:p>
+            <a:endParaRPr lang="es-PE"/>
+          </a:p>
+        </p:txBody>
       </p:sp>
       <p:sp>
         <p:nvSpPr>
@@ -13906,7 +14759,7 @@
           <a:bodyPr wrap="square" lIns="0" tIns="0" rIns="0" bIns="0" rtlCol="0" anchor="ctr"/>
           <a:lstStyle/>
           <a:p>
-            <a:pPr algn="ctr" indent="0" marL="0">
+            <a:pPr marL="0" indent="0" algn="ctr">
               <a:buNone/>
             </a:pPr>
             <a:r>
@@ -13947,6 +14800,13 @@
             <a:tailEnd type="triangle"/>
           </a:ln>
         </p:spPr>
+        <p:txBody>
+          <a:bodyPr/>
+          <a:lstStyle/>
+          <a:p>
+            <a:endParaRPr lang="es-PE"/>
+          </a:p>
+        </p:txBody>
       </p:sp>
       <p:sp>
         <p:nvSpPr>
@@ -13974,6 +14834,13 @@
             <a:prstDash val="solid"/>
           </a:ln>
         </p:spPr>
+        <p:txBody>
+          <a:bodyPr/>
+          <a:lstStyle/>
+          <a:p>
+            <a:endParaRPr lang="es-PE"/>
+          </a:p>
+        </p:txBody>
       </p:sp>
       <p:sp>
         <p:nvSpPr>
@@ -13996,7 +14863,7 @@
           <a:bodyPr wrap="square" lIns="0" tIns="0" rIns="0" bIns="0" rtlCol="0" anchor="b"/>
           <a:lstStyle/>
           <a:p>
-            <a:pPr algn="ctr" indent="0" marL="0">
+            <a:pPr marL="0" indent="0" algn="ctr">
               <a:buNone/>
             </a:pPr>
             <a:r>
@@ -14035,7 +14902,7 @@
           <a:bodyPr wrap="square" lIns="0" tIns="0" rIns="0" bIns="0" rtlCol="0" anchor="t"/>
           <a:lstStyle/>
           <a:p>
-            <a:pPr algn="ctr" indent="0" marL="0">
+            <a:pPr marL="0" indent="0" algn="ctr">
               <a:buNone/>
             </a:pPr>
             <a:r>
@@ -14074,7 +14941,7 @@
           <a:bodyPr wrap="square" lIns="0" tIns="0" rIns="0" bIns="0" rtlCol="0" anchor="ctr"/>
           <a:lstStyle/>
           <a:p>
-            <a:pPr indent="0" marL="0">
+            <a:pPr marL="0" indent="0">
               <a:buNone/>
             </a:pPr>
             <a:r>
@@ -14113,7 +14980,7 @@
           <a:bodyPr wrap="square" lIns="0" tIns="0" rIns="0" bIns="0" rtlCol="0" anchor="ctr"/>
           <a:lstStyle/>
           <a:p>
-            <a:pPr algn="r" indent="0" marL="0">
+            <a:pPr marL="0" indent="0" algn="r">
               <a:buNone/>
             </a:pPr>
             <a:r>
@@ -14147,6 +15014,7 @@
         <a:solidFill>
           <a:srgbClr val="FFFFFF"/>
         </a:solidFill>
+        <a:effectLst/>
       </p:bgPr>
     </p:bg>
     <p:spTree>
@@ -14184,11 +15052,11 @@
           <a:bodyPr wrap="square" lIns="0" tIns="0" rIns="0" bIns="0" rtlCol="0" anchor="ctr"/>
           <a:lstStyle/>
           <a:p>
-            <a:pPr indent="0" marL="0">
-              <a:buNone/>
-            </a:pPr>
-            <a:r>
-              <a:rPr lang="en-US" sz="1300" b="1" spc="200" kern="0" dirty="0">
+            <a:pPr marL="0" indent="0">
+              <a:buNone/>
+            </a:pPr>
+            <a:r>
+              <a:rPr lang="en-US" sz="1300" b="1" kern="0" spc="200" dirty="0">
                 <a:solidFill>
                   <a:srgbClr val="0A58CA"/>
                 </a:solidFill>
@@ -14223,7 +15091,7 @@
           <a:bodyPr wrap="square" lIns="0" tIns="0" rIns="0" bIns="0" rtlCol="0" anchor="ctr"/>
           <a:lstStyle/>
           <a:p>
-            <a:pPr indent="0" marL="0">
+            <a:pPr marL="0" indent="0">
               <a:buNone/>
             </a:pPr>
             <a:r>
@@ -14262,6 +15130,13 @@
           </a:solidFill>
           <a:ln/>
         </p:spPr>
+        <p:txBody>
+          <a:bodyPr/>
+          <a:lstStyle/>
+          <a:p>
+            <a:endParaRPr lang="es-PE"/>
+          </a:p>
+        </p:txBody>
       </p:sp>
       <p:sp>
         <p:nvSpPr>
@@ -14284,7 +15159,7 @@
           <a:bodyPr wrap="square" lIns="0" tIns="0" rIns="0" bIns="0" rtlCol="0" anchor="ctr"/>
           <a:lstStyle/>
           <a:p>
-            <a:pPr indent="0" marL="0">
+            <a:pPr marL="0" indent="0">
               <a:buNone/>
             </a:pPr>
             <a:r>
@@ -14328,6 +15203,13 @@
             <a:prstDash val="solid"/>
           </a:ln>
         </p:spPr>
+        <p:txBody>
+          <a:bodyPr/>
+          <a:lstStyle/>
+          <a:p>
+            <a:endParaRPr lang="es-PE"/>
+          </a:p>
+        </p:txBody>
       </p:sp>
       <p:sp>
         <p:nvSpPr>
@@ -14498,6 +15380,13 @@
           </a:solidFill>
           <a:ln/>
         </p:spPr>
+        <p:txBody>
+          <a:bodyPr/>
+          <a:lstStyle/>
+          <a:p>
+            <a:endParaRPr lang="es-PE"/>
+          </a:p>
+        </p:txBody>
       </p:sp>
       <p:sp>
         <p:nvSpPr>
@@ -14520,7 +15409,7 @@
           <a:bodyPr wrap="square" lIns="0" tIns="0" rIns="0" bIns="0" rtlCol="0" anchor="ctr"/>
           <a:lstStyle/>
           <a:p>
-            <a:pPr indent="0" marL="0">
+            <a:pPr marL="0" indent="0">
               <a:buNone/>
             </a:pPr>
             <a:r>
@@ -14564,6 +15453,13 @@
             <a:prstDash val="solid"/>
           </a:ln>
         </p:spPr>
+        <p:txBody>
+          <a:bodyPr/>
+          <a:lstStyle/>
+          <a:p>
+            <a:endParaRPr lang="es-PE"/>
+          </a:p>
+        </p:txBody>
       </p:sp>
       <p:sp>
         <p:nvSpPr>
@@ -14591,6 +15487,13 @@
             <a:prstDash val="solid"/>
           </a:ln>
         </p:spPr>
+        <p:txBody>
+          <a:bodyPr/>
+          <a:lstStyle/>
+          <a:p>
+            <a:endParaRPr lang="es-PE"/>
+          </a:p>
+        </p:txBody>
       </p:sp>
       <p:sp>
         <p:nvSpPr>
@@ -14613,7 +15516,7 @@
           <a:bodyPr wrap="square" lIns="0" tIns="0" rIns="0" bIns="0" rtlCol="0" anchor="ctr"/>
           <a:lstStyle/>
           <a:p>
-            <a:pPr algn="ctr" indent="0" marL="0">
+            <a:pPr marL="0" indent="0" algn="ctr">
               <a:buNone/>
             </a:pPr>
             <a:r>
@@ -14654,6 +15557,13 @@
             <a:tailEnd type="triangle"/>
           </a:ln>
         </p:spPr>
+        <p:txBody>
+          <a:bodyPr/>
+          <a:lstStyle/>
+          <a:p>
+            <a:endParaRPr lang="es-PE"/>
+          </a:p>
+        </p:txBody>
       </p:sp>
       <p:sp>
         <p:nvSpPr>
@@ -14681,6 +15591,13 @@
             <a:prstDash val="solid"/>
           </a:ln>
         </p:spPr>
+        <p:txBody>
+          <a:bodyPr/>
+          <a:lstStyle/>
+          <a:p>
+            <a:endParaRPr lang="es-PE"/>
+          </a:p>
+        </p:txBody>
       </p:sp>
       <p:sp>
         <p:nvSpPr>
@@ -14703,7 +15620,7 @@
           <a:bodyPr wrap="square" lIns="0" tIns="0" rIns="0" bIns="0" rtlCol="0" anchor="b"/>
           <a:lstStyle/>
           <a:p>
-            <a:pPr algn="ctr" indent="0" marL="0">
+            <a:pPr marL="0" indent="0" algn="ctr">
               <a:buNone/>
             </a:pPr>
             <a:r>
@@ -14742,7 +15659,7 @@
           <a:bodyPr wrap="square" lIns="0" tIns="0" rIns="0" bIns="0" rtlCol="0" anchor="t"/>
           <a:lstStyle/>
           <a:p>
-            <a:pPr algn="ctr" indent="0" marL="0">
+            <a:pPr marL="0" indent="0" algn="ctr">
               <a:buNone/>
             </a:pPr>
             <a:r>
@@ -14783,6 +15700,13 @@
             <a:tailEnd type="triangle"/>
           </a:ln>
         </p:spPr>
+        <p:txBody>
+          <a:bodyPr/>
+          <a:lstStyle/>
+          <a:p>
+            <a:endParaRPr lang="es-PE"/>
+          </a:p>
+        </p:txBody>
       </p:sp>
       <p:sp>
         <p:nvSpPr>
@@ -14805,6 +15729,13 @@
           </a:solidFill>
           <a:ln/>
         </p:spPr>
+        <p:txBody>
+          <a:bodyPr/>
+          <a:lstStyle/>
+          <a:p>
+            <a:endParaRPr lang="es-PE"/>
+          </a:p>
+        </p:txBody>
       </p:sp>
       <p:sp>
         <p:nvSpPr>
@@ -14827,7 +15758,7 @@
           <a:bodyPr wrap="square" lIns="0" tIns="0" rIns="0" bIns="0" rtlCol="0" anchor="ctr"/>
           <a:lstStyle/>
           <a:p>
-            <a:pPr algn="ctr" indent="0" marL="0">
+            <a:pPr marL="0" indent="0" algn="ctr">
               <a:buNone/>
             </a:pPr>
             <a:r>
@@ -14866,6 +15797,13 @@
           </a:solidFill>
           <a:ln/>
         </p:spPr>
+        <p:txBody>
+          <a:bodyPr/>
+          <a:lstStyle/>
+          <a:p>
+            <a:endParaRPr lang="es-PE"/>
+          </a:p>
+        </p:txBody>
       </p:sp>
       <p:sp>
         <p:nvSpPr>
@@ -14888,7 +15826,7 @@
           <a:bodyPr wrap="square" lIns="0" tIns="0" rIns="0" bIns="0" rtlCol="0" anchor="ctr"/>
           <a:lstStyle/>
           <a:p>
-            <a:pPr algn="ctr" indent="0" marL="0">
+            <a:pPr marL="0" indent="0" algn="ctr">
               <a:buNone/>
             </a:pPr>
             <a:r>
@@ -14929,6 +15867,13 @@
             <a:tailEnd type="triangle"/>
           </a:ln>
         </p:spPr>
+        <p:txBody>
+          <a:bodyPr/>
+          <a:lstStyle/>
+          <a:p>
+            <a:endParaRPr lang="es-PE"/>
+          </a:p>
+        </p:txBody>
       </p:sp>
       <p:sp>
         <p:nvSpPr>
@@ -14956,6 +15901,13 @@
             <a:prstDash val="solid"/>
           </a:ln>
         </p:spPr>
+        <p:txBody>
+          <a:bodyPr/>
+          <a:lstStyle/>
+          <a:p>
+            <a:endParaRPr lang="es-PE"/>
+          </a:p>
+        </p:txBody>
       </p:sp>
       <p:sp>
         <p:nvSpPr>
@@ -14978,7 +15930,7 @@
           <a:bodyPr wrap="square" lIns="0" tIns="0" rIns="0" bIns="0" rtlCol="0" anchor="b"/>
           <a:lstStyle/>
           <a:p>
-            <a:pPr algn="ctr" indent="0" marL="0">
+            <a:pPr marL="0" indent="0" algn="ctr">
               <a:buNone/>
             </a:pPr>
             <a:r>
@@ -15017,7 +15969,7 @@
           <a:bodyPr wrap="square" lIns="0" tIns="0" rIns="0" bIns="0" rtlCol="0" anchor="t"/>
           <a:lstStyle/>
           <a:p>
-            <a:pPr algn="ctr" indent="0" marL="0">
+            <a:pPr marL="0" indent="0" algn="ctr">
               <a:buNone/>
             </a:pPr>
             <a:r>
@@ -15056,7 +16008,7 @@
           <a:bodyPr wrap="square" lIns="0" tIns="0" rIns="0" bIns="0" rtlCol="0" anchor="ctr"/>
           <a:lstStyle/>
           <a:p>
-            <a:pPr algn="r" indent="0" marL="0">
+            <a:pPr marL="0" indent="0" algn="r">
               <a:buNone/>
             </a:pPr>
             <a:r>
@@ -15375,4 +16327,319 @@
     </a:ext>
   </a:extLst>
 </a:theme>
+</file>
+
+<file path=ppt/theme/theme2.xml><?xml version="1.0" encoding="utf-8"?>
+<a:theme xmlns:a="http://schemas.openxmlformats.org/drawingml/2006/main" name="Office Theme">
+  <a:themeElements>
+    <a:clrScheme name="Office">
+      <a:dk1>
+        <a:sysClr val="windowText" lastClr="000000"/>
+      </a:dk1>
+      <a:lt1>
+        <a:sysClr val="window" lastClr="FFFFFF"/>
+      </a:lt1>
+      <a:dk2>
+        <a:srgbClr val="0E2841"/>
+      </a:dk2>
+      <a:lt2>
+        <a:srgbClr val="E8E8E8"/>
+      </a:lt2>
+      <a:accent1>
+        <a:srgbClr val="156082"/>
+      </a:accent1>
+      <a:accent2>
+        <a:srgbClr val="E97132"/>
+      </a:accent2>
+      <a:accent3>
+        <a:srgbClr val="196B24"/>
+      </a:accent3>
+      <a:accent4>
+        <a:srgbClr val="0F9ED5"/>
+      </a:accent4>
+      <a:accent5>
+        <a:srgbClr val="A02B93"/>
+      </a:accent5>
+      <a:accent6>
+        <a:srgbClr val="4EA72E"/>
+      </a:accent6>
+      <a:hlink>
+        <a:srgbClr val="467886"/>
+      </a:hlink>
+      <a:folHlink>
+        <a:srgbClr val="96607D"/>
+      </a:folHlink>
+    </a:clrScheme>
+    <a:fontScheme name="Office">
+      <a:majorFont>
+        <a:latin typeface="Aptos Display" panose="02110004020202020204"/>
+        <a:ea typeface=""/>
+        <a:cs typeface=""/>
+        <a:font script="Jpan" typeface="游ゴシック Light"/>
+        <a:font script="Hang" typeface="맑은 고딕"/>
+        <a:font script="Hans" typeface="等线 Light"/>
+        <a:font script="Hant" typeface="新細明體"/>
+        <a:font script="Arab" typeface="Times New Roman"/>
+        <a:font script="Hebr" typeface="Times New Roman"/>
+        <a:font script="Thai" typeface="Angsana New"/>
+        <a:font script="Ethi" typeface="Nyala"/>
+        <a:font script="Beng" typeface="Vrinda"/>
+        <a:font script="Gujr" typeface="Shruti"/>
+        <a:font script="Khmr" typeface="MoolBoran"/>
+        <a:font script="Knda" typeface="Tunga"/>
+        <a:font script="Guru" typeface="Raavi"/>
+        <a:font script="Cans" typeface="Euphemia"/>
+        <a:font script="Cher" typeface="Plantagenet Cherokee"/>
+        <a:font script="Yiii" typeface="Microsoft Yi Baiti"/>
+        <a:font script="Tibt" typeface="Microsoft Himalaya"/>
+        <a:font script="Thaa" typeface="MV Boli"/>
+        <a:font script="Deva" typeface="Mangal"/>
+        <a:font script="Telu" typeface="Gautami"/>
+        <a:font script="Taml" typeface="Latha"/>
+        <a:font script="Syrc" typeface="Estrangelo Edessa"/>
+        <a:font script="Orya" typeface="Kalinga"/>
+        <a:font script="Mlym" typeface="Kartika"/>
+        <a:font script="Laoo" typeface="DokChampa"/>
+        <a:font script="Sinh" typeface="Iskoola Pota"/>
+        <a:font script="Mong" typeface="Mongolian Baiti"/>
+        <a:font script="Viet" typeface="Times New Roman"/>
+        <a:font script="Uigh" typeface="Microsoft Uighur"/>
+        <a:font script="Geor" typeface="Sylfaen"/>
+        <a:font script="Armn" typeface="Arial"/>
+        <a:font script="Bugi" typeface="Leelawadee UI"/>
+        <a:font script="Bopo" typeface="Microsoft JhengHei"/>
+        <a:font script="Java" typeface="Javanese Text"/>
+        <a:font script="Lisu" typeface="Segoe UI"/>
+        <a:font script="Mymr" typeface="Myanmar Text"/>
+        <a:font script="Nkoo" typeface="Ebrima"/>
+        <a:font script="Olck" typeface="Nirmala UI"/>
+        <a:font script="Osma" typeface="Ebrima"/>
+        <a:font script="Phag" typeface="Phagspa"/>
+        <a:font script="Syrn" typeface="Estrangelo Edessa"/>
+        <a:font script="Syrj" typeface="Estrangelo Edessa"/>
+        <a:font script="Syre" typeface="Estrangelo Edessa"/>
+        <a:font script="Sora" typeface="Nirmala UI"/>
+        <a:font script="Tale" typeface="Microsoft Tai Le"/>
+        <a:font script="Talu" typeface="Microsoft New Tai Lue"/>
+        <a:font script="Tfng" typeface="Ebrima"/>
+      </a:majorFont>
+      <a:minorFont>
+        <a:latin typeface="Aptos" panose="02110004020202020204"/>
+        <a:ea typeface=""/>
+        <a:cs typeface=""/>
+        <a:font script="Jpan" typeface="游ゴシック"/>
+        <a:font script="Hang" typeface="맑은 고딕"/>
+        <a:font script="Hans" typeface="等线"/>
+        <a:font script="Hant" typeface="新細明體"/>
+        <a:font script="Arab" typeface="Arial"/>
+        <a:font script="Hebr" typeface="Arial"/>
+        <a:font script="Thai" typeface="Cordia New"/>
+        <a:font script="Ethi" typeface="Nyala"/>
+        <a:font script="Beng" typeface="Vrinda"/>
+        <a:font script="Gujr" typeface="Shruti"/>
+        <a:font script="Khmr" typeface="DaunPenh"/>
+        <a:font script="Knda" typeface="Tunga"/>
+        <a:font script="Guru" typeface="Raavi"/>
+        <a:font script="Cans" typeface="Euphemia"/>
+        <a:font script="Cher" typeface="Plantagenet Cherokee"/>
+        <a:font script="Yiii" typeface="Microsoft Yi Baiti"/>
+        <a:font script="Tibt" typeface="Microsoft Himalaya"/>
+        <a:font script="Thaa" typeface="MV Boli"/>
+        <a:font script="Deva" typeface="Mangal"/>
+        <a:font script="Telu" typeface="Gautami"/>
+        <a:font script="Taml" typeface="Latha"/>
+        <a:font script="Syrc" typeface="Estrangelo Edessa"/>
+        <a:font script="Orya" typeface="Kalinga"/>
+        <a:font script="Mlym" typeface="Kartika"/>
+        <a:font script="Laoo" typeface="DokChampa"/>
+        <a:font script="Sinh" typeface="Iskoola Pota"/>
+        <a:font script="Mong" typeface="Mongolian Baiti"/>
+        <a:font script="Viet" typeface="Arial"/>
+        <a:font script="Uigh" typeface="Microsoft Uighur"/>
+        <a:font script="Geor" typeface="Sylfaen"/>
+        <a:font script="Armn" typeface="Arial"/>
+        <a:font script="Bugi" typeface="Leelawadee UI"/>
+        <a:font script="Bopo" typeface="Microsoft JhengHei"/>
+        <a:font script="Java" typeface="Javanese Text"/>
+        <a:font script="Lisu" typeface="Segoe UI"/>
+        <a:font script="Mymr" typeface="Myanmar Text"/>
+        <a:font script="Nkoo" typeface="Ebrima"/>
+        <a:font script="Olck" typeface="Nirmala UI"/>
+        <a:font script="Osma" typeface="Ebrima"/>
+        <a:font script="Phag" typeface="Phagspa"/>
+        <a:font script="Syrn" typeface="Estrangelo Edessa"/>
+        <a:font script="Syrj" typeface="Estrangelo Edessa"/>
+        <a:font script="Syre" typeface="Estrangelo Edessa"/>
+        <a:font script="Sora" typeface="Nirmala UI"/>
+        <a:font script="Tale" typeface="Microsoft Tai Le"/>
+        <a:font script="Talu" typeface="Microsoft New Tai Lue"/>
+        <a:font script="Tfng" typeface="Ebrima"/>
+      </a:minorFont>
+    </a:fontScheme>
+    <a:fmtScheme name="Office">
+      <a:fillStyleLst>
+        <a:solidFill>
+          <a:schemeClr val="phClr"/>
+        </a:solidFill>
+        <a:gradFill rotWithShape="1">
+          <a:gsLst>
+            <a:gs pos="0">
+              <a:schemeClr val="phClr">
+                <a:lumMod val="110000"/>
+                <a:satMod val="105000"/>
+                <a:tint val="67000"/>
+              </a:schemeClr>
+            </a:gs>
+            <a:gs pos="50000">
+              <a:schemeClr val="phClr">
+                <a:lumMod val="105000"/>
+                <a:satMod val="103000"/>
+                <a:tint val="73000"/>
+              </a:schemeClr>
+            </a:gs>
+            <a:gs pos="100000">
+              <a:schemeClr val="phClr">
+                <a:lumMod val="105000"/>
+                <a:satMod val="109000"/>
+                <a:tint val="81000"/>
+              </a:schemeClr>
+            </a:gs>
+          </a:gsLst>
+          <a:lin ang="5400000" scaled="0"/>
+        </a:gradFill>
+        <a:gradFill rotWithShape="1">
+          <a:gsLst>
+            <a:gs pos="0">
+              <a:schemeClr val="phClr">
+                <a:satMod val="103000"/>
+                <a:lumMod val="102000"/>
+                <a:tint val="94000"/>
+              </a:schemeClr>
+            </a:gs>
+            <a:gs pos="50000">
+              <a:schemeClr val="phClr">
+                <a:satMod val="110000"/>
+                <a:lumMod val="100000"/>
+                <a:shade val="100000"/>
+              </a:schemeClr>
+            </a:gs>
+            <a:gs pos="100000">
+              <a:schemeClr val="phClr">
+                <a:lumMod val="99000"/>
+                <a:satMod val="120000"/>
+                <a:shade val="78000"/>
+              </a:schemeClr>
+            </a:gs>
+          </a:gsLst>
+          <a:lin ang="5400000" scaled="0"/>
+        </a:gradFill>
+      </a:fillStyleLst>
+      <a:lnStyleLst>
+        <a:ln w="12700" cap="flat" cmpd="sng" algn="ctr">
+          <a:solidFill>
+            <a:schemeClr val="phClr"/>
+          </a:solidFill>
+          <a:prstDash val="solid"/>
+          <a:miter lim="800000"/>
+        </a:ln>
+        <a:ln w="19050" cap="flat" cmpd="sng" algn="ctr">
+          <a:solidFill>
+            <a:schemeClr val="phClr"/>
+          </a:solidFill>
+          <a:prstDash val="solid"/>
+          <a:miter lim="800000"/>
+        </a:ln>
+        <a:ln w="25400" cap="flat" cmpd="sng" algn="ctr">
+          <a:solidFill>
+            <a:schemeClr val="phClr"/>
+          </a:solidFill>
+          <a:prstDash val="solid"/>
+          <a:miter lim="800000"/>
+        </a:ln>
+      </a:lnStyleLst>
+      <a:effectStyleLst>
+        <a:effectStyle>
+          <a:effectLst/>
+        </a:effectStyle>
+        <a:effectStyle>
+          <a:effectLst/>
+        </a:effectStyle>
+        <a:effectStyle>
+          <a:effectLst>
+            <a:outerShdw blurRad="57150" dist="19050" dir="5400000" algn="ctr" rotWithShape="0">
+              <a:srgbClr val="000000">
+                <a:alpha val="63000"/>
+              </a:srgbClr>
+            </a:outerShdw>
+          </a:effectLst>
+        </a:effectStyle>
+      </a:effectStyleLst>
+      <a:bgFillStyleLst>
+        <a:solidFill>
+          <a:schemeClr val="phClr"/>
+        </a:solidFill>
+        <a:solidFill>
+          <a:schemeClr val="phClr">
+            <a:tint val="95000"/>
+            <a:satMod val="170000"/>
+          </a:schemeClr>
+        </a:solidFill>
+        <a:gradFill rotWithShape="1">
+          <a:gsLst>
+            <a:gs pos="0">
+              <a:schemeClr val="phClr">
+                <a:tint val="93000"/>
+                <a:satMod val="150000"/>
+                <a:shade val="98000"/>
+                <a:lumMod val="102000"/>
+              </a:schemeClr>
+            </a:gs>
+            <a:gs pos="50000">
+              <a:schemeClr val="phClr">
+                <a:tint val="98000"/>
+                <a:satMod val="130000"/>
+                <a:shade val="90000"/>
+                <a:lumMod val="103000"/>
+              </a:schemeClr>
+            </a:gs>
+            <a:gs pos="100000">
+              <a:schemeClr val="phClr">
+                <a:shade val="63000"/>
+                <a:satMod val="120000"/>
+              </a:schemeClr>
+            </a:gs>
+          </a:gsLst>
+          <a:lin ang="5400000" scaled="0"/>
+        </a:gradFill>
+      </a:bgFillStyleLst>
+    </a:fmtScheme>
+  </a:themeElements>
+  <a:objectDefaults>
+    <a:lnDef>
+      <a:spPr/>
+      <a:bodyPr/>
+      <a:lstStyle/>
+      <a:style>
+        <a:lnRef idx="2">
+          <a:schemeClr val="accent1"/>
+        </a:lnRef>
+        <a:fillRef idx="0">
+          <a:schemeClr val="accent1"/>
+        </a:fillRef>
+        <a:effectRef idx="1">
+          <a:schemeClr val="accent1"/>
+        </a:effectRef>
+        <a:fontRef idx="minor">
+          <a:schemeClr val="tx1"/>
+        </a:fontRef>
+      </a:style>
+    </a:lnDef>
+  </a:objectDefaults>
+  <a:extraClrSchemeLst/>
+  <a:extLst>
+    <a:ext uri="{05A4C25C-085E-4340-85A3-A5531E510DB2}">
+      <thm15:themeFamily xmlns:thm15="http://schemas.microsoft.com/office/thememl/2012/main" name="Office Theme" id="{2E142A2C-CD16-42D6-873A-C26D2A0506FA}" vid="{1BDDFF52-6CD6-40A5-AB3C-68EB2F1E4D0A}"/>
+    </a:ext>
+  </a:extLst>
+</a:theme>
 </file>